--- a/workshop/figures/figures.pptx
+++ b/workshop/figures/figures.pptx
@@ -6,6 +6,7 @@
   </p:sldMasterIdLst>
   <p:sldIdLst>
     <p:sldId id="256" r:id="rId2"/>
+    <p:sldId id="257" r:id="rId3"/>
   </p:sldIdLst>
   <p:sldSz cx="12192000" cy="6858000"/>
   <p:notesSz cx="6858000" cy="9144000"/>
@@ -104,6 +105,11 @@
       </a:defRPr>
     </a:lvl9pPr>
   </p:defaultTextStyle>
+  <p:extLst>
+    <p:ext uri="{EFAFB233-063F-42B5-8137-9DF3F51BA10A}">
+      <p15:sldGuideLst xmlns:p15="http://schemas.microsoft.com/office/powerpoint/2012/main"/>
+    </p:ext>
+  </p:extLst>
 </p:presentation>
 </file>
 
@@ -256,7 +262,7 @@
           <a:p>
             <a:fld id="{047943D2-0C06-2845-8DCC-15A3A0AAB898}" type="datetimeFigureOut">
               <a:rPr lang="en-US" smtClean="0"/>
-              <a:t>2/18/26</a:t>
+              <a:t>2/23/26</a:t>
             </a:fld>
             <a:endParaRPr lang="en-US"/>
           </a:p>
@@ -456,7 +462,7 @@
           <a:p>
             <a:fld id="{047943D2-0C06-2845-8DCC-15A3A0AAB898}" type="datetimeFigureOut">
               <a:rPr lang="en-US" smtClean="0"/>
-              <a:t>2/18/26</a:t>
+              <a:t>2/23/26</a:t>
             </a:fld>
             <a:endParaRPr lang="en-US"/>
           </a:p>
@@ -666,7 +672,7 @@
           <a:p>
             <a:fld id="{047943D2-0C06-2845-8DCC-15A3A0AAB898}" type="datetimeFigureOut">
               <a:rPr lang="en-US" smtClean="0"/>
-              <a:t>2/18/26</a:t>
+              <a:t>2/23/26</a:t>
             </a:fld>
             <a:endParaRPr lang="en-US"/>
           </a:p>
@@ -866,7 +872,7 @@
           <a:p>
             <a:fld id="{047943D2-0C06-2845-8DCC-15A3A0AAB898}" type="datetimeFigureOut">
               <a:rPr lang="en-US" smtClean="0"/>
-              <a:t>2/18/26</a:t>
+              <a:t>2/23/26</a:t>
             </a:fld>
             <a:endParaRPr lang="en-US"/>
           </a:p>
@@ -1142,7 +1148,7 @@
           <a:p>
             <a:fld id="{047943D2-0C06-2845-8DCC-15A3A0AAB898}" type="datetimeFigureOut">
               <a:rPr lang="en-US" smtClean="0"/>
-              <a:t>2/18/26</a:t>
+              <a:t>2/23/26</a:t>
             </a:fld>
             <a:endParaRPr lang="en-US"/>
           </a:p>
@@ -1410,7 +1416,7 @@
           <a:p>
             <a:fld id="{047943D2-0C06-2845-8DCC-15A3A0AAB898}" type="datetimeFigureOut">
               <a:rPr lang="en-US" smtClean="0"/>
-              <a:t>2/18/26</a:t>
+              <a:t>2/23/26</a:t>
             </a:fld>
             <a:endParaRPr lang="en-US"/>
           </a:p>
@@ -1825,7 +1831,7 @@
           <a:p>
             <a:fld id="{047943D2-0C06-2845-8DCC-15A3A0AAB898}" type="datetimeFigureOut">
               <a:rPr lang="en-US" smtClean="0"/>
-              <a:t>2/18/26</a:t>
+              <a:t>2/23/26</a:t>
             </a:fld>
             <a:endParaRPr lang="en-US"/>
           </a:p>
@@ -1967,7 +1973,7 @@
           <a:p>
             <a:fld id="{047943D2-0C06-2845-8DCC-15A3A0AAB898}" type="datetimeFigureOut">
               <a:rPr lang="en-US" smtClean="0"/>
-              <a:t>2/18/26</a:t>
+              <a:t>2/23/26</a:t>
             </a:fld>
             <a:endParaRPr lang="en-US"/>
           </a:p>
@@ -2080,7 +2086,7 @@
           <a:p>
             <a:fld id="{047943D2-0C06-2845-8DCC-15A3A0AAB898}" type="datetimeFigureOut">
               <a:rPr lang="en-US" smtClean="0"/>
-              <a:t>2/18/26</a:t>
+              <a:t>2/23/26</a:t>
             </a:fld>
             <a:endParaRPr lang="en-US"/>
           </a:p>
@@ -2393,7 +2399,7 @@
           <a:p>
             <a:fld id="{047943D2-0C06-2845-8DCC-15A3A0AAB898}" type="datetimeFigureOut">
               <a:rPr lang="en-US" smtClean="0"/>
-              <a:t>2/18/26</a:t>
+              <a:t>2/23/26</a:t>
             </a:fld>
             <a:endParaRPr lang="en-US"/>
           </a:p>
@@ -2682,7 +2688,7 @@
           <a:p>
             <a:fld id="{047943D2-0C06-2845-8DCC-15A3A0AAB898}" type="datetimeFigureOut">
               <a:rPr lang="en-US" smtClean="0"/>
-              <a:t>2/18/26</a:t>
+              <a:t>2/23/26</a:t>
             </a:fld>
             <a:endParaRPr lang="en-US"/>
           </a:p>
@@ -2925,7 +2931,7 @@
           <a:p>
             <a:fld id="{047943D2-0C06-2845-8DCC-15A3A0AAB898}" type="datetimeFigureOut">
               <a:rPr lang="en-US" smtClean="0"/>
-              <a:t>2/18/26</a:t>
+              <a:t>2/23/26</a:t>
             </a:fld>
             <a:endParaRPr lang="en-US"/>
           </a:p>
@@ -6261,6 +6267,3278 @@
 </p:sld>
 </file>
 
+<file path=ppt/slides/slide2.xml><?xml version="1.0" encoding="utf-8"?>
+<p:sld xmlns:a="http://schemas.openxmlformats.org/drawingml/2006/main" xmlns:r="http://schemas.openxmlformats.org/officeDocument/2006/relationships" xmlns:p="http://schemas.openxmlformats.org/presentationml/2006/main">
+  <p:cSld>
+    <p:spTree>
+      <p:nvGrpSpPr>
+        <p:cNvPr id="1" name="">
+          <a:extLst>
+            <a:ext uri="{FF2B5EF4-FFF2-40B4-BE49-F238E27FC236}">
+              <a16:creationId xmlns:a16="http://schemas.microsoft.com/office/drawing/2014/main" id="{66F8F69B-9A5C-120E-F382-3631061EF0D9}"/>
+            </a:ext>
+          </a:extLst>
+        </p:cNvPr>
+        <p:cNvGrpSpPr/>
+        <p:nvPr/>
+      </p:nvGrpSpPr>
+      <p:grpSpPr>
+        <a:xfrm>
+          <a:off x="0" y="0"/>
+          <a:ext cx="0" cy="0"/>
+          <a:chOff x="0" y="0"/>
+          <a:chExt cx="0" cy="0"/>
+        </a:xfrm>
+      </p:grpSpPr>
+      <p:grpSp>
+        <p:nvGrpSpPr>
+          <p:cNvPr id="131" name="Group 130">
+            <a:extLst>
+              <a:ext uri="{FF2B5EF4-FFF2-40B4-BE49-F238E27FC236}">
+                <a16:creationId xmlns:a16="http://schemas.microsoft.com/office/drawing/2014/main" id="{54E75E75-3899-E6BF-80BC-A9A66E0F1C26}"/>
+              </a:ext>
+            </a:extLst>
+          </p:cNvPr>
+          <p:cNvGrpSpPr/>
+          <p:nvPr/>
+        </p:nvGrpSpPr>
+        <p:grpSpPr>
+          <a:xfrm>
+            <a:off x="674557" y="1633928"/>
+            <a:ext cx="8244591" cy="4527029"/>
+            <a:chOff x="674557" y="1633928"/>
+            <a:chExt cx="8244591" cy="4527029"/>
+          </a:xfrm>
+        </p:grpSpPr>
+        <p:sp>
+          <p:nvSpPr>
+            <p:cNvPr id="130" name="Rectangle 129">
+              <a:extLst>
+                <a:ext uri="{FF2B5EF4-FFF2-40B4-BE49-F238E27FC236}">
+                  <a16:creationId xmlns:a16="http://schemas.microsoft.com/office/drawing/2014/main" id="{9CAC7A32-49BF-096F-FDAC-9EC79535A465}"/>
+                </a:ext>
+              </a:extLst>
+            </p:cNvPr>
+            <p:cNvSpPr/>
+            <p:nvPr/>
+          </p:nvSpPr>
+          <p:spPr>
+            <a:xfrm>
+              <a:off x="674557" y="1633928"/>
+              <a:ext cx="8244591" cy="4527029"/>
+            </a:xfrm>
+            <a:prstGeom prst="rect">
+              <a:avLst/>
+            </a:prstGeom>
+            <a:solidFill>
+              <a:schemeClr val="bg1"/>
+            </a:solidFill>
+            <a:ln>
+              <a:solidFill>
+                <a:schemeClr val="tx1"/>
+              </a:solidFill>
+            </a:ln>
+          </p:spPr>
+          <p:style>
+            <a:lnRef idx="2">
+              <a:schemeClr val="accent1">
+                <a:shade val="15000"/>
+              </a:schemeClr>
+            </a:lnRef>
+            <a:fillRef idx="1">
+              <a:schemeClr val="accent1"/>
+            </a:fillRef>
+            <a:effectRef idx="0">
+              <a:schemeClr val="accent1"/>
+            </a:effectRef>
+            <a:fontRef idx="minor">
+              <a:schemeClr val="lt1"/>
+            </a:fontRef>
+          </p:style>
+          <p:txBody>
+            <a:bodyPr rtlCol="0" anchor="ctr"/>
+            <a:lstStyle/>
+            <a:p>
+              <a:pPr algn="ctr"/>
+              <a:endParaRPr lang="en-US"/>
+            </a:p>
+          </p:txBody>
+        </p:sp>
+        <p:sp>
+          <p:nvSpPr>
+            <p:cNvPr id="2" name="Oval 1">
+              <a:extLst>
+                <a:ext uri="{FF2B5EF4-FFF2-40B4-BE49-F238E27FC236}">
+                  <a16:creationId xmlns:a16="http://schemas.microsoft.com/office/drawing/2014/main" id="{74B850A4-7EC6-3014-89C9-3DBDA48C87F8}"/>
+                </a:ext>
+              </a:extLst>
+            </p:cNvPr>
+            <p:cNvSpPr/>
+            <p:nvPr/>
+          </p:nvSpPr>
+          <p:spPr>
+            <a:xfrm>
+              <a:off x="960699" y="2858948"/>
+              <a:ext cx="2419109" cy="2419109"/>
+            </a:xfrm>
+            <a:prstGeom prst="ellipse">
+              <a:avLst/>
+            </a:prstGeom>
+            <a:solidFill>
+              <a:srgbClr val="92D050">
+                <a:alpha val="70667"/>
+              </a:srgbClr>
+            </a:solidFill>
+          </p:spPr>
+          <p:style>
+            <a:lnRef idx="2">
+              <a:schemeClr val="accent1">
+                <a:shade val="15000"/>
+              </a:schemeClr>
+            </a:lnRef>
+            <a:fillRef idx="1">
+              <a:schemeClr val="accent1"/>
+            </a:fillRef>
+            <a:effectRef idx="0">
+              <a:schemeClr val="accent1"/>
+            </a:effectRef>
+            <a:fontRef idx="minor">
+              <a:schemeClr val="lt1"/>
+            </a:fontRef>
+          </p:style>
+          <p:txBody>
+            <a:bodyPr rtlCol="0" anchor="ctr"/>
+            <a:lstStyle/>
+            <a:p>
+              <a:pPr algn="ctr"/>
+              <a:endParaRPr lang="en-US"/>
+            </a:p>
+          </p:txBody>
+        </p:sp>
+        <p:sp>
+          <p:nvSpPr>
+            <p:cNvPr id="3" name="Oval 2">
+              <a:extLst>
+                <a:ext uri="{FF2B5EF4-FFF2-40B4-BE49-F238E27FC236}">
+                  <a16:creationId xmlns:a16="http://schemas.microsoft.com/office/drawing/2014/main" id="{5317156A-71D5-E252-48CA-5B6ECC57E80C}"/>
+                </a:ext>
+              </a:extLst>
+            </p:cNvPr>
+            <p:cNvSpPr/>
+            <p:nvPr/>
+          </p:nvSpPr>
+          <p:spPr>
+            <a:xfrm>
+              <a:off x="2170253" y="2858948"/>
+              <a:ext cx="2419109" cy="2419109"/>
+            </a:xfrm>
+            <a:prstGeom prst="ellipse">
+              <a:avLst/>
+            </a:prstGeom>
+            <a:solidFill>
+              <a:srgbClr val="FF0000">
+                <a:alpha val="48752"/>
+              </a:srgbClr>
+            </a:solidFill>
+          </p:spPr>
+          <p:style>
+            <a:lnRef idx="2">
+              <a:schemeClr val="accent1">
+                <a:shade val="15000"/>
+              </a:schemeClr>
+            </a:lnRef>
+            <a:fillRef idx="1">
+              <a:schemeClr val="accent1"/>
+            </a:fillRef>
+            <a:effectRef idx="0">
+              <a:schemeClr val="accent1"/>
+            </a:effectRef>
+            <a:fontRef idx="minor">
+              <a:schemeClr val="lt1"/>
+            </a:fontRef>
+          </p:style>
+          <p:txBody>
+            <a:bodyPr rtlCol="0" anchor="ctr"/>
+            <a:lstStyle/>
+            <a:p>
+              <a:pPr algn="ctr"/>
+              <a:endParaRPr lang="en-US"/>
+            </a:p>
+          </p:txBody>
+        </p:sp>
+        <p:sp>
+          <p:nvSpPr>
+            <p:cNvPr id="28" name="TextBox 27">
+              <a:extLst>
+                <a:ext uri="{FF2B5EF4-FFF2-40B4-BE49-F238E27FC236}">
+                  <a16:creationId xmlns:a16="http://schemas.microsoft.com/office/drawing/2014/main" id="{9DF0A354-98CB-68C5-8904-A8D38F80E7BF}"/>
+                </a:ext>
+              </a:extLst>
+            </p:cNvPr>
+            <p:cNvSpPr txBox="1"/>
+            <p:nvPr/>
+          </p:nvSpPr>
+          <p:spPr>
+            <a:xfrm>
+              <a:off x="3764813" y="3136612"/>
+              <a:ext cx="439544" cy="584775"/>
+            </a:xfrm>
+            <a:prstGeom prst="rect">
+              <a:avLst/>
+            </a:prstGeom>
+            <a:noFill/>
+          </p:spPr>
+          <p:txBody>
+            <a:bodyPr wrap="none" rtlCol="0">
+              <a:spAutoFit/>
+            </a:bodyPr>
+            <a:lstStyle/>
+            <a:p>
+              <a:r>
+                <a:rPr lang="en-US" sz="3200" dirty="0"/>
+                <a:t>B</a:t>
+              </a:r>
+            </a:p>
+          </p:txBody>
+        </p:sp>
+        <p:sp>
+          <p:nvSpPr>
+            <p:cNvPr id="64" name="TextBox 63">
+              <a:extLst>
+                <a:ext uri="{FF2B5EF4-FFF2-40B4-BE49-F238E27FC236}">
+                  <a16:creationId xmlns:a16="http://schemas.microsoft.com/office/drawing/2014/main" id="{EDAF82AF-EE39-27CC-85A1-152952DA881B}"/>
+                </a:ext>
+              </a:extLst>
+            </p:cNvPr>
+            <p:cNvSpPr txBox="1"/>
+            <p:nvPr/>
+          </p:nvSpPr>
+          <p:spPr>
+            <a:xfrm>
+              <a:off x="1318435" y="3136611"/>
+              <a:ext cx="439544" cy="584775"/>
+            </a:xfrm>
+            <a:prstGeom prst="rect">
+              <a:avLst/>
+            </a:prstGeom>
+            <a:noFill/>
+          </p:spPr>
+          <p:txBody>
+            <a:bodyPr wrap="none" rtlCol="0">
+              <a:spAutoFit/>
+            </a:bodyPr>
+            <a:lstStyle/>
+            <a:p>
+              <a:r>
+                <a:rPr lang="en-US" sz="3200" dirty="0"/>
+                <a:t>A</a:t>
+              </a:r>
+            </a:p>
+          </p:txBody>
+        </p:sp>
+        <p:sp>
+          <p:nvSpPr>
+            <p:cNvPr id="66" name="TextBox 65">
+              <a:extLst>
+                <a:ext uri="{FF2B5EF4-FFF2-40B4-BE49-F238E27FC236}">
+                  <a16:creationId xmlns:a16="http://schemas.microsoft.com/office/drawing/2014/main" id="{8F8BD3A0-E2B8-E056-ADF2-D5CB8E0D1CEA}"/>
+                </a:ext>
+              </a:extLst>
+            </p:cNvPr>
+            <p:cNvSpPr txBox="1"/>
+            <p:nvPr/>
+          </p:nvSpPr>
+          <p:spPr>
+            <a:xfrm>
+              <a:off x="2328965" y="3878932"/>
+              <a:ext cx="928459" cy="584775"/>
+            </a:xfrm>
+            <a:prstGeom prst="rect">
+              <a:avLst/>
+            </a:prstGeom>
+            <a:noFill/>
+          </p:spPr>
+          <p:txBody>
+            <a:bodyPr wrap="none" rtlCol="0">
+              <a:spAutoFit/>
+            </a:bodyPr>
+            <a:lstStyle/>
+            <a:p>
+              <a:r>
+                <a:rPr lang="en-US" sz="3200" dirty="0"/>
+                <a:t>A∩B</a:t>
+              </a:r>
+            </a:p>
+          </p:txBody>
+        </p:sp>
+        <p:sp>
+          <p:nvSpPr>
+            <p:cNvPr id="67" name="TextBox 66">
+              <a:extLst>
+                <a:ext uri="{FF2B5EF4-FFF2-40B4-BE49-F238E27FC236}">
+                  <a16:creationId xmlns:a16="http://schemas.microsoft.com/office/drawing/2014/main" id="{7B362D09-F02E-6A32-CFB2-3C5448DA503A}"/>
+                </a:ext>
+              </a:extLst>
+            </p:cNvPr>
+            <p:cNvSpPr txBox="1"/>
+            <p:nvPr/>
+          </p:nvSpPr>
+          <p:spPr>
+            <a:xfrm>
+              <a:off x="1198045" y="5517783"/>
+              <a:ext cx="3190296" cy="461665"/>
+            </a:xfrm>
+            <a:prstGeom prst="rect">
+              <a:avLst/>
+            </a:prstGeom>
+            <a:noFill/>
+          </p:spPr>
+          <p:txBody>
+            <a:bodyPr wrap="none" rtlCol="0">
+              <a:spAutoFit/>
+            </a:bodyPr>
+            <a:lstStyle/>
+            <a:p>
+              <a:pPr algn="ctr"/>
+              <a:r>
+                <a:rPr lang="en-US" sz="2400" dirty="0"/>
+                <a:t>|A∪B| = |A| + |B| - |A∩B|</a:t>
+              </a:r>
+            </a:p>
+          </p:txBody>
+        </p:sp>
+        <p:sp>
+          <p:nvSpPr>
+            <p:cNvPr id="70" name="TextBox 69">
+              <a:extLst>
+                <a:ext uri="{FF2B5EF4-FFF2-40B4-BE49-F238E27FC236}">
+                  <a16:creationId xmlns:a16="http://schemas.microsoft.com/office/drawing/2014/main" id="{A2F29CD7-8E8A-CBB7-835B-37120D629729}"/>
+                </a:ext>
+              </a:extLst>
+            </p:cNvPr>
+            <p:cNvSpPr txBox="1"/>
+            <p:nvPr/>
+          </p:nvSpPr>
+          <p:spPr>
+            <a:xfrm>
+              <a:off x="1324654" y="1861923"/>
+              <a:ext cx="2939394" cy="584775"/>
+            </a:xfrm>
+            <a:prstGeom prst="rect">
+              <a:avLst/>
+            </a:prstGeom>
+            <a:noFill/>
+          </p:spPr>
+          <p:txBody>
+            <a:bodyPr wrap="none" rtlCol="0">
+              <a:spAutoFit/>
+            </a:bodyPr>
+            <a:lstStyle/>
+            <a:p>
+              <a:r>
+                <a:rPr lang="en-US" sz="3200" b="1" u="sng" dirty="0"/>
+                <a:t>Overlap-based</a:t>
+              </a:r>
+            </a:p>
+          </p:txBody>
+        </p:sp>
+        <p:grpSp>
+          <p:nvGrpSpPr>
+            <p:cNvPr id="129" name="Group 128">
+              <a:extLst>
+                <a:ext uri="{FF2B5EF4-FFF2-40B4-BE49-F238E27FC236}">
+                  <a16:creationId xmlns:a16="http://schemas.microsoft.com/office/drawing/2014/main" id="{51D3D94F-56E0-7C97-9831-CF6FE73CD53B}"/>
+                </a:ext>
+              </a:extLst>
+            </p:cNvPr>
+            <p:cNvGrpSpPr/>
+            <p:nvPr/>
+          </p:nvGrpSpPr>
+          <p:grpSpPr>
+            <a:xfrm>
+              <a:off x="5473602" y="1861923"/>
+              <a:ext cx="3141437" cy="3740509"/>
+              <a:chOff x="7132266" y="1861922"/>
+              <a:chExt cx="3141437" cy="3740509"/>
+            </a:xfrm>
+          </p:grpSpPr>
+          <p:sp>
+            <p:nvSpPr>
+              <p:cNvPr id="71" name="TextBox 70">
+                <a:extLst>
+                  <a:ext uri="{FF2B5EF4-FFF2-40B4-BE49-F238E27FC236}">
+                    <a16:creationId xmlns:a16="http://schemas.microsoft.com/office/drawing/2014/main" id="{996D91C3-FC90-3974-D382-E392E4BF530C}"/>
+                  </a:ext>
+                </a:extLst>
+              </p:cNvPr>
+              <p:cNvSpPr txBox="1"/>
+              <p:nvPr/>
+            </p:nvSpPr>
+            <p:spPr>
+              <a:xfrm>
+                <a:off x="7132266" y="1861922"/>
+                <a:ext cx="3141437" cy="584775"/>
+              </a:xfrm>
+              <a:prstGeom prst="rect">
+                <a:avLst/>
+              </a:prstGeom>
+              <a:noFill/>
+            </p:spPr>
+            <p:txBody>
+              <a:bodyPr wrap="none" rtlCol="0">
+                <a:spAutoFit/>
+              </a:bodyPr>
+              <a:lstStyle/>
+              <a:p>
+                <a:r>
+                  <a:rPr lang="en-US" sz="3200" b="1" u="sng" dirty="0"/>
+                  <a:t>Distance-based</a:t>
+                </a:r>
+              </a:p>
+            </p:txBody>
+          </p:sp>
+          <p:sp>
+            <p:nvSpPr>
+              <p:cNvPr id="73" name="Freeform 72">
+                <a:extLst>
+                  <a:ext uri="{FF2B5EF4-FFF2-40B4-BE49-F238E27FC236}">
+                    <a16:creationId xmlns:a16="http://schemas.microsoft.com/office/drawing/2014/main" id="{9EA4084A-1D94-DAB8-7F64-25F8E09634D7}"/>
+                  </a:ext>
+                </a:extLst>
+              </p:cNvPr>
+              <p:cNvSpPr/>
+              <p:nvPr/>
+            </p:nvSpPr>
+            <p:spPr>
+              <a:xfrm>
+                <a:off x="7371470" y="3055548"/>
+                <a:ext cx="2278966" cy="2462235"/>
+              </a:xfrm>
+              <a:custGeom>
+                <a:avLst/>
+                <a:gdLst>
+                  <a:gd name="csX0" fmla="*/ 647114 w 2278966"/>
+                  <a:gd name="csY0" fmla="*/ 154745 h 2462235"/>
+                  <a:gd name="csX1" fmla="*/ 506437 w 2278966"/>
+                  <a:gd name="csY1" fmla="*/ 196948 h 2462235"/>
+                  <a:gd name="csX2" fmla="*/ 393896 w 2278966"/>
+                  <a:gd name="csY2" fmla="*/ 253219 h 2462235"/>
+                  <a:gd name="csX3" fmla="*/ 365760 w 2278966"/>
+                  <a:gd name="csY3" fmla="*/ 281354 h 2462235"/>
+                  <a:gd name="csX4" fmla="*/ 323557 w 2278966"/>
+                  <a:gd name="csY4" fmla="*/ 295422 h 2462235"/>
+                  <a:gd name="csX5" fmla="*/ 239151 w 2278966"/>
+                  <a:gd name="csY5" fmla="*/ 351692 h 2462235"/>
+                  <a:gd name="csX6" fmla="*/ 182880 w 2278966"/>
+                  <a:gd name="csY6" fmla="*/ 407963 h 2462235"/>
+                  <a:gd name="csX7" fmla="*/ 168812 w 2278966"/>
+                  <a:gd name="csY7" fmla="*/ 520505 h 2462235"/>
+                  <a:gd name="csX8" fmla="*/ 196948 w 2278966"/>
+                  <a:gd name="csY8" fmla="*/ 872197 h 2462235"/>
+                  <a:gd name="csX9" fmla="*/ 211016 w 2278966"/>
+                  <a:gd name="csY9" fmla="*/ 914400 h 2462235"/>
+                  <a:gd name="csX10" fmla="*/ 168812 w 2278966"/>
+                  <a:gd name="csY10" fmla="*/ 1252025 h 2462235"/>
+                  <a:gd name="csX11" fmla="*/ 140677 w 2278966"/>
+                  <a:gd name="csY11" fmla="*/ 1294228 h 2462235"/>
+                  <a:gd name="csX12" fmla="*/ 98474 w 2278966"/>
+                  <a:gd name="csY12" fmla="*/ 1336431 h 2462235"/>
+                  <a:gd name="csX13" fmla="*/ 14068 w 2278966"/>
+                  <a:gd name="csY13" fmla="*/ 1491175 h 2462235"/>
+                  <a:gd name="csX14" fmla="*/ 0 w 2278966"/>
+                  <a:gd name="csY14" fmla="*/ 1547446 h 2462235"/>
+                  <a:gd name="csX15" fmla="*/ 28136 w 2278966"/>
+                  <a:gd name="csY15" fmla="*/ 1786597 h 2462235"/>
+                  <a:gd name="csX16" fmla="*/ 56271 w 2278966"/>
+                  <a:gd name="csY16" fmla="*/ 1885071 h 2462235"/>
+                  <a:gd name="csX17" fmla="*/ 112542 w 2278966"/>
+                  <a:gd name="csY17" fmla="*/ 1955409 h 2462235"/>
+                  <a:gd name="csX18" fmla="*/ 154745 w 2278966"/>
+                  <a:gd name="csY18" fmla="*/ 2011680 h 2462235"/>
+                  <a:gd name="csX19" fmla="*/ 267286 w 2278966"/>
+                  <a:gd name="csY19" fmla="*/ 2096086 h 2462235"/>
+                  <a:gd name="csX20" fmla="*/ 351692 w 2278966"/>
+                  <a:gd name="csY20" fmla="*/ 2180492 h 2462235"/>
+                  <a:gd name="csX21" fmla="*/ 422031 w 2278966"/>
+                  <a:gd name="csY21" fmla="*/ 2250831 h 2462235"/>
+                  <a:gd name="csX22" fmla="*/ 506437 w 2278966"/>
+                  <a:gd name="csY22" fmla="*/ 2307102 h 2462235"/>
+                  <a:gd name="csX23" fmla="*/ 604911 w 2278966"/>
+                  <a:gd name="csY23" fmla="*/ 2363372 h 2462235"/>
+                  <a:gd name="csX24" fmla="*/ 633046 w 2278966"/>
+                  <a:gd name="csY24" fmla="*/ 2391508 h 2462235"/>
+                  <a:gd name="csX25" fmla="*/ 689317 w 2278966"/>
+                  <a:gd name="csY25" fmla="*/ 2405575 h 2462235"/>
+                  <a:gd name="csX26" fmla="*/ 731520 w 2278966"/>
+                  <a:gd name="csY26" fmla="*/ 2419643 h 2462235"/>
+                  <a:gd name="csX27" fmla="*/ 787791 w 2278966"/>
+                  <a:gd name="csY27" fmla="*/ 2433711 h 2462235"/>
+                  <a:gd name="csX28" fmla="*/ 872197 w 2278966"/>
+                  <a:gd name="csY28" fmla="*/ 2461846 h 2462235"/>
+                  <a:gd name="csX29" fmla="*/ 1406769 w 2278966"/>
+                  <a:gd name="csY29" fmla="*/ 2433711 h 2462235"/>
+                  <a:gd name="csX30" fmla="*/ 1448972 w 2278966"/>
+                  <a:gd name="csY30" fmla="*/ 2419643 h 2462235"/>
+                  <a:gd name="csX31" fmla="*/ 1561514 w 2278966"/>
+                  <a:gd name="csY31" fmla="*/ 2321169 h 2462235"/>
+                  <a:gd name="csX32" fmla="*/ 1603717 w 2278966"/>
+                  <a:gd name="csY32" fmla="*/ 2278966 h 2462235"/>
+                  <a:gd name="csX33" fmla="*/ 1645920 w 2278966"/>
+                  <a:gd name="csY33" fmla="*/ 2236763 h 2462235"/>
+                  <a:gd name="csX34" fmla="*/ 1688123 w 2278966"/>
+                  <a:gd name="csY34" fmla="*/ 2208628 h 2462235"/>
+                  <a:gd name="csX35" fmla="*/ 1744394 w 2278966"/>
+                  <a:gd name="csY35" fmla="*/ 2138289 h 2462235"/>
+                  <a:gd name="csX36" fmla="*/ 1842868 w 2278966"/>
+                  <a:gd name="csY36" fmla="*/ 2096086 h 2462235"/>
+                  <a:gd name="csX37" fmla="*/ 1885071 w 2278966"/>
+                  <a:gd name="csY37" fmla="*/ 2082019 h 2462235"/>
+                  <a:gd name="csX38" fmla="*/ 2067951 w 2278966"/>
+                  <a:gd name="csY38" fmla="*/ 2039815 h 2462235"/>
+                  <a:gd name="csX39" fmla="*/ 2124222 w 2278966"/>
+                  <a:gd name="csY39" fmla="*/ 1899139 h 2462235"/>
+                  <a:gd name="csX40" fmla="*/ 2152357 w 2278966"/>
+                  <a:gd name="csY40" fmla="*/ 1758462 h 2462235"/>
+                  <a:gd name="csX41" fmla="*/ 2180492 w 2278966"/>
+                  <a:gd name="csY41" fmla="*/ 1674055 h 2462235"/>
+                  <a:gd name="csX42" fmla="*/ 2194560 w 2278966"/>
+                  <a:gd name="csY42" fmla="*/ 1631852 h 2462235"/>
+                  <a:gd name="csX43" fmla="*/ 2222696 w 2278966"/>
+                  <a:gd name="csY43" fmla="*/ 1533379 h 2462235"/>
+                  <a:gd name="csX44" fmla="*/ 2236763 w 2278966"/>
+                  <a:gd name="csY44" fmla="*/ 1477108 h 2462235"/>
+                  <a:gd name="csX45" fmla="*/ 2264899 w 2278966"/>
+                  <a:gd name="csY45" fmla="*/ 1378634 h 2462235"/>
+                  <a:gd name="csX46" fmla="*/ 2278966 w 2278966"/>
+                  <a:gd name="csY46" fmla="*/ 1266092 h 2462235"/>
+                  <a:gd name="csX47" fmla="*/ 2264899 w 2278966"/>
+                  <a:gd name="csY47" fmla="*/ 844062 h 2462235"/>
+                  <a:gd name="csX48" fmla="*/ 2222696 w 2278966"/>
+                  <a:gd name="csY48" fmla="*/ 773723 h 2462235"/>
+                  <a:gd name="csX49" fmla="*/ 2110154 w 2278966"/>
+                  <a:gd name="csY49" fmla="*/ 647114 h 2462235"/>
+                  <a:gd name="csX50" fmla="*/ 2067951 w 2278966"/>
+                  <a:gd name="csY50" fmla="*/ 618979 h 2462235"/>
+                  <a:gd name="csX51" fmla="*/ 1969477 w 2278966"/>
+                  <a:gd name="csY51" fmla="*/ 548640 h 2462235"/>
+                  <a:gd name="csX52" fmla="*/ 1941342 w 2278966"/>
+                  <a:gd name="csY52" fmla="*/ 506437 h 2462235"/>
+                  <a:gd name="csX53" fmla="*/ 1899139 w 2278966"/>
+                  <a:gd name="csY53" fmla="*/ 478302 h 2462235"/>
+                  <a:gd name="csX54" fmla="*/ 1828800 w 2278966"/>
+                  <a:gd name="csY54" fmla="*/ 407963 h 2462235"/>
+                  <a:gd name="csX55" fmla="*/ 1786597 w 2278966"/>
+                  <a:gd name="csY55" fmla="*/ 365760 h 2462235"/>
+                  <a:gd name="csX56" fmla="*/ 1744394 w 2278966"/>
+                  <a:gd name="csY56" fmla="*/ 309489 h 2462235"/>
+                  <a:gd name="csX57" fmla="*/ 1688123 w 2278966"/>
+                  <a:gd name="csY57" fmla="*/ 225083 h 2462235"/>
+                  <a:gd name="csX58" fmla="*/ 1603717 w 2278966"/>
+                  <a:gd name="csY58" fmla="*/ 140677 h 2462235"/>
+                  <a:gd name="csX59" fmla="*/ 1505243 w 2278966"/>
+                  <a:gd name="csY59" fmla="*/ 70339 h 2462235"/>
+                  <a:gd name="csX60" fmla="*/ 1448972 w 2278966"/>
+                  <a:gd name="csY60" fmla="*/ 42203 h 2462235"/>
+                  <a:gd name="csX61" fmla="*/ 1280160 w 2278966"/>
+                  <a:gd name="csY61" fmla="*/ 14068 h 2462235"/>
+                  <a:gd name="csX62" fmla="*/ 1195754 w 2278966"/>
+                  <a:gd name="csY62" fmla="*/ 0 h 2462235"/>
+                  <a:gd name="csX63" fmla="*/ 900332 w 2278966"/>
+                  <a:gd name="csY63" fmla="*/ 14068 h 2462235"/>
+                  <a:gd name="csX64" fmla="*/ 844062 w 2278966"/>
+                  <a:gd name="csY64" fmla="*/ 42203 h 2462235"/>
+                  <a:gd name="csX65" fmla="*/ 787791 w 2278966"/>
+                  <a:gd name="csY65" fmla="*/ 56271 h 2462235"/>
+                  <a:gd name="csX66" fmla="*/ 745588 w 2278966"/>
+                  <a:gd name="csY66" fmla="*/ 70339 h 2462235"/>
+                  <a:gd name="csX67" fmla="*/ 717452 w 2278966"/>
+                  <a:gd name="csY67" fmla="*/ 98474 h 2462235"/>
+                  <a:gd name="csX68" fmla="*/ 647114 w 2278966"/>
+                  <a:gd name="csY68" fmla="*/ 154745 h 2462235"/>
+                </a:gdLst>
+                <a:ahLst/>
+                <a:cxnLst>
+                  <a:cxn ang="0">
+                    <a:pos x="csX0" y="csY0"/>
+                  </a:cxn>
+                  <a:cxn ang="0">
+                    <a:pos x="csX1" y="csY1"/>
+                  </a:cxn>
+                  <a:cxn ang="0">
+                    <a:pos x="csX2" y="csY2"/>
+                  </a:cxn>
+                  <a:cxn ang="0">
+                    <a:pos x="csX3" y="csY3"/>
+                  </a:cxn>
+                  <a:cxn ang="0">
+                    <a:pos x="csX4" y="csY4"/>
+                  </a:cxn>
+                  <a:cxn ang="0">
+                    <a:pos x="csX5" y="csY5"/>
+                  </a:cxn>
+                  <a:cxn ang="0">
+                    <a:pos x="csX6" y="csY6"/>
+                  </a:cxn>
+                  <a:cxn ang="0">
+                    <a:pos x="csX7" y="csY7"/>
+                  </a:cxn>
+                  <a:cxn ang="0">
+                    <a:pos x="csX8" y="csY8"/>
+                  </a:cxn>
+                  <a:cxn ang="0">
+                    <a:pos x="csX9" y="csY9"/>
+                  </a:cxn>
+                  <a:cxn ang="0">
+                    <a:pos x="csX10" y="csY10"/>
+                  </a:cxn>
+                  <a:cxn ang="0">
+                    <a:pos x="csX11" y="csY11"/>
+                  </a:cxn>
+                  <a:cxn ang="0">
+                    <a:pos x="csX12" y="csY12"/>
+                  </a:cxn>
+                  <a:cxn ang="0">
+                    <a:pos x="csX13" y="csY13"/>
+                  </a:cxn>
+                  <a:cxn ang="0">
+                    <a:pos x="csX14" y="csY14"/>
+                  </a:cxn>
+                  <a:cxn ang="0">
+                    <a:pos x="csX15" y="csY15"/>
+                  </a:cxn>
+                  <a:cxn ang="0">
+                    <a:pos x="csX16" y="csY16"/>
+                  </a:cxn>
+                  <a:cxn ang="0">
+                    <a:pos x="csX17" y="csY17"/>
+                  </a:cxn>
+                  <a:cxn ang="0">
+                    <a:pos x="csX18" y="csY18"/>
+                  </a:cxn>
+                  <a:cxn ang="0">
+                    <a:pos x="csX19" y="csY19"/>
+                  </a:cxn>
+                  <a:cxn ang="0">
+                    <a:pos x="csX20" y="csY20"/>
+                  </a:cxn>
+                  <a:cxn ang="0">
+                    <a:pos x="csX21" y="csY21"/>
+                  </a:cxn>
+                  <a:cxn ang="0">
+                    <a:pos x="csX22" y="csY22"/>
+                  </a:cxn>
+                  <a:cxn ang="0">
+                    <a:pos x="csX23" y="csY23"/>
+                  </a:cxn>
+                  <a:cxn ang="0">
+                    <a:pos x="csX24" y="csY24"/>
+                  </a:cxn>
+                  <a:cxn ang="0">
+                    <a:pos x="csX25" y="csY25"/>
+                  </a:cxn>
+                  <a:cxn ang="0">
+                    <a:pos x="csX26" y="csY26"/>
+                  </a:cxn>
+                  <a:cxn ang="0">
+                    <a:pos x="csX27" y="csY27"/>
+                  </a:cxn>
+                  <a:cxn ang="0">
+                    <a:pos x="csX28" y="csY28"/>
+                  </a:cxn>
+                  <a:cxn ang="0">
+                    <a:pos x="csX29" y="csY29"/>
+                  </a:cxn>
+                  <a:cxn ang="0">
+                    <a:pos x="csX30" y="csY30"/>
+                  </a:cxn>
+                  <a:cxn ang="0">
+                    <a:pos x="csX31" y="csY31"/>
+                  </a:cxn>
+                  <a:cxn ang="0">
+                    <a:pos x="csX32" y="csY32"/>
+                  </a:cxn>
+                  <a:cxn ang="0">
+                    <a:pos x="csX33" y="csY33"/>
+                  </a:cxn>
+                  <a:cxn ang="0">
+                    <a:pos x="csX34" y="csY34"/>
+                  </a:cxn>
+                  <a:cxn ang="0">
+                    <a:pos x="csX35" y="csY35"/>
+                  </a:cxn>
+                  <a:cxn ang="0">
+                    <a:pos x="csX36" y="csY36"/>
+                  </a:cxn>
+                  <a:cxn ang="0">
+                    <a:pos x="csX37" y="csY37"/>
+                  </a:cxn>
+                  <a:cxn ang="0">
+                    <a:pos x="csX38" y="csY38"/>
+                  </a:cxn>
+                  <a:cxn ang="0">
+                    <a:pos x="csX39" y="csY39"/>
+                  </a:cxn>
+                  <a:cxn ang="0">
+                    <a:pos x="csX40" y="csY40"/>
+                  </a:cxn>
+                  <a:cxn ang="0">
+                    <a:pos x="csX41" y="csY41"/>
+                  </a:cxn>
+                  <a:cxn ang="0">
+                    <a:pos x="csX42" y="csY42"/>
+                  </a:cxn>
+                  <a:cxn ang="0">
+                    <a:pos x="csX43" y="csY43"/>
+                  </a:cxn>
+                  <a:cxn ang="0">
+                    <a:pos x="csX44" y="csY44"/>
+                  </a:cxn>
+                  <a:cxn ang="0">
+                    <a:pos x="csX45" y="csY45"/>
+                  </a:cxn>
+                  <a:cxn ang="0">
+                    <a:pos x="csX46" y="csY46"/>
+                  </a:cxn>
+                  <a:cxn ang="0">
+                    <a:pos x="csX47" y="csY47"/>
+                  </a:cxn>
+                  <a:cxn ang="0">
+                    <a:pos x="csX48" y="csY48"/>
+                  </a:cxn>
+                  <a:cxn ang="0">
+                    <a:pos x="csX49" y="csY49"/>
+                  </a:cxn>
+                  <a:cxn ang="0">
+                    <a:pos x="csX50" y="csY50"/>
+                  </a:cxn>
+                  <a:cxn ang="0">
+                    <a:pos x="csX51" y="csY51"/>
+                  </a:cxn>
+                  <a:cxn ang="0">
+                    <a:pos x="csX52" y="csY52"/>
+                  </a:cxn>
+                  <a:cxn ang="0">
+                    <a:pos x="csX53" y="csY53"/>
+                  </a:cxn>
+                  <a:cxn ang="0">
+                    <a:pos x="csX54" y="csY54"/>
+                  </a:cxn>
+                  <a:cxn ang="0">
+                    <a:pos x="csX55" y="csY55"/>
+                  </a:cxn>
+                  <a:cxn ang="0">
+                    <a:pos x="csX56" y="csY56"/>
+                  </a:cxn>
+                  <a:cxn ang="0">
+                    <a:pos x="csX57" y="csY57"/>
+                  </a:cxn>
+                  <a:cxn ang="0">
+                    <a:pos x="csX58" y="csY58"/>
+                  </a:cxn>
+                  <a:cxn ang="0">
+                    <a:pos x="csX59" y="csY59"/>
+                  </a:cxn>
+                  <a:cxn ang="0">
+                    <a:pos x="csX60" y="csY60"/>
+                  </a:cxn>
+                  <a:cxn ang="0">
+                    <a:pos x="csX61" y="csY61"/>
+                  </a:cxn>
+                  <a:cxn ang="0">
+                    <a:pos x="csX62" y="csY62"/>
+                  </a:cxn>
+                  <a:cxn ang="0">
+                    <a:pos x="csX63" y="csY63"/>
+                  </a:cxn>
+                  <a:cxn ang="0">
+                    <a:pos x="csX64" y="csY64"/>
+                  </a:cxn>
+                  <a:cxn ang="0">
+                    <a:pos x="csX65" y="csY65"/>
+                  </a:cxn>
+                  <a:cxn ang="0">
+                    <a:pos x="csX66" y="csY66"/>
+                  </a:cxn>
+                  <a:cxn ang="0">
+                    <a:pos x="csX67" y="csY67"/>
+                  </a:cxn>
+                  <a:cxn ang="0">
+                    <a:pos x="csX68" y="csY68"/>
+                  </a:cxn>
+                </a:cxnLst>
+                <a:rect l="l" t="t" r="r" b="b"/>
+                <a:pathLst>
+                  <a:path w="2278966" h="2462235">
+                    <a:moveTo>
+                      <a:pt x="647114" y="154745"/>
+                    </a:moveTo>
+                    <a:cubicBezTo>
+                      <a:pt x="611945" y="171157"/>
+                      <a:pt x="577204" y="164286"/>
+                      <a:pt x="506437" y="196948"/>
+                    </a:cubicBezTo>
+                    <a:cubicBezTo>
+                      <a:pt x="468356" y="214524"/>
+                      <a:pt x="423554" y="223562"/>
+                      <a:pt x="393896" y="253219"/>
+                    </a:cubicBezTo>
+                    <a:cubicBezTo>
+                      <a:pt x="384517" y="262597"/>
+                      <a:pt x="377133" y="274530"/>
+                      <a:pt x="365760" y="281354"/>
+                    </a:cubicBezTo>
+                    <a:cubicBezTo>
+                      <a:pt x="353044" y="288983"/>
+                      <a:pt x="336520" y="288221"/>
+                      <a:pt x="323557" y="295422"/>
+                    </a:cubicBezTo>
+                    <a:cubicBezTo>
+                      <a:pt x="293998" y="311844"/>
+                      <a:pt x="263061" y="327782"/>
+                      <a:pt x="239151" y="351692"/>
+                    </a:cubicBezTo>
+                    <a:lnTo>
+                      <a:pt x="182880" y="407963"/>
+                    </a:lnTo>
+                    <a:cubicBezTo>
+                      <a:pt x="178191" y="445477"/>
+                      <a:pt x="168812" y="482699"/>
+                      <a:pt x="168812" y="520505"/>
+                    </a:cubicBezTo>
+                    <a:cubicBezTo>
+                      <a:pt x="168812" y="685956"/>
+                      <a:pt x="161909" y="749561"/>
+                      <a:pt x="196948" y="872197"/>
+                    </a:cubicBezTo>
+                    <a:cubicBezTo>
+                      <a:pt x="201022" y="886455"/>
+                      <a:pt x="206327" y="900332"/>
+                      <a:pt x="211016" y="914400"/>
+                    </a:cubicBezTo>
+                    <a:cubicBezTo>
+                      <a:pt x="209521" y="941315"/>
+                      <a:pt x="218693" y="1177202"/>
+                      <a:pt x="168812" y="1252025"/>
+                    </a:cubicBezTo>
+                    <a:cubicBezTo>
+                      <a:pt x="159434" y="1266093"/>
+                      <a:pt x="151501" y="1281240"/>
+                      <a:pt x="140677" y="1294228"/>
+                    </a:cubicBezTo>
+                    <a:cubicBezTo>
+                      <a:pt x="127941" y="1309512"/>
+                      <a:pt x="110175" y="1320341"/>
+                      <a:pt x="98474" y="1336431"/>
+                    </a:cubicBezTo>
+                    <a:cubicBezTo>
+                      <a:pt x="48252" y="1405486"/>
+                      <a:pt x="32748" y="1425796"/>
+                      <a:pt x="14068" y="1491175"/>
+                    </a:cubicBezTo>
+                    <a:cubicBezTo>
+                      <a:pt x="8756" y="1509765"/>
+                      <a:pt x="4689" y="1528689"/>
+                      <a:pt x="0" y="1547446"/>
+                    </a:cubicBezTo>
+                    <a:cubicBezTo>
+                      <a:pt x="22499" y="1862426"/>
+                      <a:pt x="-8407" y="1658695"/>
+                      <a:pt x="28136" y="1786597"/>
+                    </a:cubicBezTo>
+                    <a:cubicBezTo>
+                      <a:pt x="34148" y="1807638"/>
+                      <a:pt x="45025" y="1862579"/>
+                      <a:pt x="56271" y="1885071"/>
+                    </a:cubicBezTo>
+                    <a:cubicBezTo>
+                      <a:pt x="82360" y="1937248"/>
+                      <a:pt x="79827" y="1916152"/>
+                      <a:pt x="112542" y="1955409"/>
+                    </a:cubicBezTo>
+                    <a:cubicBezTo>
+                      <a:pt x="127552" y="1973421"/>
+                      <a:pt x="137396" y="1995908"/>
+                      <a:pt x="154745" y="2011680"/>
+                    </a:cubicBezTo>
+                    <a:cubicBezTo>
+                      <a:pt x="189442" y="2043223"/>
+                      <a:pt x="239151" y="2058572"/>
+                      <a:pt x="267286" y="2096086"/>
+                    </a:cubicBezTo>
+                    <a:cubicBezTo>
+                      <a:pt x="358533" y="2217749"/>
+                      <a:pt x="261930" y="2101950"/>
+                      <a:pt x="351692" y="2180492"/>
+                    </a:cubicBezTo>
+                    <a:cubicBezTo>
+                      <a:pt x="376646" y="2202327"/>
+                      <a:pt x="394442" y="2232438"/>
+                      <a:pt x="422031" y="2250831"/>
+                    </a:cubicBezTo>
+                    <a:cubicBezTo>
+                      <a:pt x="450166" y="2269588"/>
+                      <a:pt x="479745" y="2286342"/>
+                      <a:pt x="506437" y="2307102"/>
+                    </a:cubicBezTo>
+                    <a:cubicBezTo>
+                      <a:pt x="585836" y="2368857"/>
+                      <a:pt x="506477" y="2338765"/>
+                      <a:pt x="604911" y="2363372"/>
+                    </a:cubicBezTo>
+                    <a:cubicBezTo>
+                      <a:pt x="614289" y="2372751"/>
+                      <a:pt x="621183" y="2385577"/>
+                      <a:pt x="633046" y="2391508"/>
+                    </a:cubicBezTo>
+                    <a:cubicBezTo>
+                      <a:pt x="650339" y="2400155"/>
+                      <a:pt x="670727" y="2400264"/>
+                      <a:pt x="689317" y="2405575"/>
+                    </a:cubicBezTo>
+                    <a:cubicBezTo>
+                      <a:pt x="703575" y="2409649"/>
+                      <a:pt x="717262" y="2415569"/>
+                      <a:pt x="731520" y="2419643"/>
+                    </a:cubicBezTo>
+                    <a:cubicBezTo>
+                      <a:pt x="750110" y="2424955"/>
+                      <a:pt x="769272" y="2428155"/>
+                      <a:pt x="787791" y="2433711"/>
+                    </a:cubicBezTo>
+                    <a:cubicBezTo>
+                      <a:pt x="816197" y="2442233"/>
+                      <a:pt x="872197" y="2461846"/>
+                      <a:pt x="872197" y="2461846"/>
+                    </a:cubicBezTo>
+                    <a:cubicBezTo>
+                      <a:pt x="1032984" y="2456974"/>
+                      <a:pt x="1235179" y="2476610"/>
+                      <a:pt x="1406769" y="2433711"/>
+                    </a:cubicBezTo>
+                    <a:cubicBezTo>
+                      <a:pt x="1421155" y="2430114"/>
+                      <a:pt x="1435709" y="2426275"/>
+                      <a:pt x="1448972" y="2419643"/>
+                    </a:cubicBezTo>
+                    <a:cubicBezTo>
+                      <a:pt x="1495505" y="2396377"/>
+                      <a:pt x="1524838" y="2357845"/>
+                      <a:pt x="1561514" y="2321169"/>
+                    </a:cubicBezTo>
+                    <a:lnTo>
+                      <a:pt x="1603717" y="2278966"/>
+                    </a:lnTo>
+                    <a:cubicBezTo>
+                      <a:pt x="1617785" y="2264898"/>
+                      <a:pt x="1629367" y="2247798"/>
+                      <a:pt x="1645920" y="2236763"/>
+                    </a:cubicBezTo>
+                    <a:cubicBezTo>
+                      <a:pt x="1659988" y="2227385"/>
+                      <a:pt x="1674921" y="2219190"/>
+                      <a:pt x="1688123" y="2208628"/>
+                    </a:cubicBezTo>
+                    <a:cubicBezTo>
+                      <a:pt x="1757732" y="2152941"/>
+                      <a:pt x="1671275" y="2211408"/>
+                      <a:pt x="1744394" y="2138289"/>
+                    </a:cubicBezTo>
+                    <a:cubicBezTo>
+                      <a:pt x="1778658" y="2104025"/>
+                      <a:pt x="1797670" y="2109000"/>
+                      <a:pt x="1842868" y="2096086"/>
+                    </a:cubicBezTo>
+                    <a:cubicBezTo>
+                      <a:pt x="1857126" y="2092012"/>
+                      <a:pt x="1871003" y="2086708"/>
+                      <a:pt x="1885071" y="2082019"/>
+                    </a:cubicBezTo>
+                    <a:cubicBezTo>
+                      <a:pt x="1982376" y="2092830"/>
+                      <a:pt x="2016430" y="2129975"/>
+                      <a:pt x="2067951" y="2039815"/>
+                    </a:cubicBezTo>
+                    <a:cubicBezTo>
+                      <a:pt x="2093008" y="1995965"/>
+                      <a:pt x="2124222" y="1899139"/>
+                      <a:pt x="2124222" y="1899139"/>
+                    </a:cubicBezTo>
+                    <a:cubicBezTo>
+                      <a:pt x="2133600" y="1852247"/>
+                      <a:pt x="2137235" y="1803829"/>
+                      <a:pt x="2152357" y="1758462"/>
+                    </a:cubicBezTo>
+                    <a:lnTo>
+                      <a:pt x="2180492" y="1674055"/>
+                    </a:lnTo>
+                    <a:cubicBezTo>
+                      <a:pt x="2185181" y="1659987"/>
+                      <a:pt x="2190963" y="1646238"/>
+                      <a:pt x="2194560" y="1631852"/>
+                    </a:cubicBezTo>
+                    <a:cubicBezTo>
+                      <a:pt x="2238555" y="1455877"/>
+                      <a:pt x="2182319" y="1674701"/>
+                      <a:pt x="2222696" y="1533379"/>
+                    </a:cubicBezTo>
+                    <a:cubicBezTo>
+                      <a:pt x="2228007" y="1514789"/>
+                      <a:pt x="2231452" y="1495698"/>
+                      <a:pt x="2236763" y="1477108"/>
+                    </a:cubicBezTo>
+                    <a:cubicBezTo>
+                      <a:pt x="2277137" y="1335795"/>
+                      <a:pt x="2220907" y="1554599"/>
+                      <a:pt x="2264899" y="1378634"/>
+                    </a:cubicBezTo>
+                    <a:cubicBezTo>
+                      <a:pt x="2269588" y="1341120"/>
+                      <a:pt x="2278966" y="1303898"/>
+                      <a:pt x="2278966" y="1266092"/>
+                    </a:cubicBezTo>
+                    <a:cubicBezTo>
+                      <a:pt x="2278966" y="1125337"/>
+                      <a:pt x="2273414" y="984559"/>
+                      <a:pt x="2264899" y="844062"/>
+                    </a:cubicBezTo>
+                    <a:cubicBezTo>
+                      <a:pt x="2262096" y="797807"/>
+                      <a:pt x="2247489" y="804715"/>
+                      <a:pt x="2222696" y="773723"/>
+                    </a:cubicBezTo>
+                    <a:cubicBezTo>
+                      <a:pt x="2174373" y="713319"/>
+                      <a:pt x="2202081" y="708398"/>
+                      <a:pt x="2110154" y="647114"/>
+                    </a:cubicBezTo>
+                    <a:cubicBezTo>
+                      <a:pt x="2096086" y="637736"/>
+                      <a:pt x="2080788" y="629982"/>
+                      <a:pt x="2067951" y="618979"/>
+                    </a:cubicBezTo>
+                    <a:cubicBezTo>
+                      <a:pt x="1982988" y="546153"/>
+                      <a:pt x="2047023" y="574489"/>
+                      <a:pt x="1969477" y="548640"/>
+                    </a:cubicBezTo>
+                    <a:cubicBezTo>
+                      <a:pt x="1960099" y="534572"/>
+                      <a:pt x="1953297" y="518392"/>
+                      <a:pt x="1941342" y="506437"/>
+                    </a:cubicBezTo>
+                    <a:cubicBezTo>
+                      <a:pt x="1929387" y="494482"/>
+                      <a:pt x="1911863" y="489435"/>
+                      <a:pt x="1899139" y="478302"/>
+                    </a:cubicBezTo>
+                    <a:cubicBezTo>
+                      <a:pt x="1874185" y="456467"/>
+                      <a:pt x="1852246" y="431409"/>
+                      <a:pt x="1828800" y="407963"/>
+                    </a:cubicBezTo>
+                    <a:cubicBezTo>
+                      <a:pt x="1814732" y="393895"/>
+                      <a:pt x="1798534" y="381676"/>
+                      <a:pt x="1786597" y="365760"/>
+                    </a:cubicBezTo>
+                    <a:cubicBezTo>
+                      <a:pt x="1772529" y="347003"/>
+                      <a:pt x="1757840" y="328697"/>
+                      <a:pt x="1744394" y="309489"/>
+                    </a:cubicBezTo>
+                    <a:cubicBezTo>
+                      <a:pt x="1725003" y="281787"/>
+                      <a:pt x="1712033" y="248993"/>
+                      <a:pt x="1688123" y="225083"/>
+                    </a:cubicBezTo>
+                    <a:cubicBezTo>
+                      <a:pt x="1659988" y="196948"/>
+                      <a:pt x="1627591" y="172509"/>
+                      <a:pt x="1603717" y="140677"/>
+                    </a:cubicBezTo>
+                    <a:cubicBezTo>
+                      <a:pt x="1549914" y="68939"/>
+                      <a:pt x="1584260" y="90092"/>
+                      <a:pt x="1505243" y="70339"/>
+                    </a:cubicBezTo>
+                    <a:cubicBezTo>
+                      <a:pt x="1486486" y="60960"/>
+                      <a:pt x="1468608" y="49567"/>
+                      <a:pt x="1448972" y="42203"/>
+                    </a:cubicBezTo>
+                    <a:cubicBezTo>
+                      <a:pt x="1400888" y="24171"/>
+                      <a:pt x="1324160" y="20354"/>
+                      <a:pt x="1280160" y="14068"/>
+                    </a:cubicBezTo>
+                    <a:cubicBezTo>
+                      <a:pt x="1251923" y="10034"/>
+                      <a:pt x="1223889" y="4689"/>
+                      <a:pt x="1195754" y="0"/>
+                    </a:cubicBezTo>
+                    <a:cubicBezTo>
+                      <a:pt x="1097280" y="4689"/>
+                      <a:pt x="998215" y="2322"/>
+                      <a:pt x="900332" y="14068"/>
+                    </a:cubicBezTo>
+                    <a:cubicBezTo>
+                      <a:pt x="879511" y="16567"/>
+                      <a:pt x="863697" y="34840"/>
+                      <a:pt x="844062" y="42203"/>
+                    </a:cubicBezTo>
+                    <a:cubicBezTo>
+                      <a:pt x="825959" y="48992"/>
+                      <a:pt x="806381" y="50959"/>
+                      <a:pt x="787791" y="56271"/>
+                    </a:cubicBezTo>
+                    <a:cubicBezTo>
+                      <a:pt x="773533" y="60345"/>
+                      <a:pt x="759656" y="65650"/>
+                      <a:pt x="745588" y="70339"/>
+                    </a:cubicBezTo>
+                    <a:cubicBezTo>
+                      <a:pt x="736209" y="79717"/>
+                      <a:pt x="727809" y="90189"/>
+                      <a:pt x="717452" y="98474"/>
+                    </a:cubicBezTo>
+                    <a:cubicBezTo>
+                      <a:pt x="689160" y="121107"/>
+                      <a:pt x="682283" y="138333"/>
+                      <a:pt x="647114" y="154745"/>
+                    </a:cubicBezTo>
+                    <a:close/>
+                  </a:path>
+                </a:pathLst>
+              </a:custGeom>
+              <a:noFill/>
+              <a:ln w="41275">
+                <a:solidFill>
+                  <a:srgbClr val="FA848E"/>
+                </a:solidFill>
+              </a:ln>
+            </p:spPr>
+            <p:style>
+              <a:lnRef idx="2">
+                <a:schemeClr val="accent1">
+                  <a:shade val="15000"/>
+                </a:schemeClr>
+              </a:lnRef>
+              <a:fillRef idx="1">
+                <a:schemeClr val="accent1"/>
+              </a:fillRef>
+              <a:effectRef idx="0">
+                <a:schemeClr val="accent1"/>
+              </a:effectRef>
+              <a:fontRef idx="minor">
+                <a:schemeClr val="lt1"/>
+              </a:fontRef>
+            </p:style>
+            <p:txBody>
+              <a:bodyPr rtlCol="0" anchor="ctr"/>
+              <a:lstStyle/>
+              <a:p>
+                <a:pPr algn="ctr"/>
+                <a:endParaRPr lang="en-US"/>
+              </a:p>
+            </p:txBody>
+          </p:sp>
+          <p:sp>
+            <p:nvSpPr>
+              <p:cNvPr id="74" name="Freeform 73">
+                <a:extLst>
+                  <a:ext uri="{FF2B5EF4-FFF2-40B4-BE49-F238E27FC236}">
+                    <a16:creationId xmlns:a16="http://schemas.microsoft.com/office/drawing/2014/main" id="{3123E771-4916-1C6E-878D-A192AE6D5BE0}"/>
+                  </a:ext>
+                </a:extLst>
+              </p:cNvPr>
+              <p:cNvSpPr/>
+              <p:nvPr/>
+            </p:nvSpPr>
+            <p:spPr>
+              <a:xfrm>
+                <a:off x="7842470" y="3358531"/>
+                <a:ext cx="1477108" cy="1919526"/>
+              </a:xfrm>
+              <a:custGeom>
+                <a:avLst/>
+                <a:gdLst>
+                  <a:gd name="csX0" fmla="*/ 42203 w 1256087"/>
+                  <a:gd name="csY0" fmla="*/ 1342965 h 1764996"/>
+                  <a:gd name="csX1" fmla="*/ 14068 w 1256087"/>
+                  <a:gd name="csY1" fmla="*/ 1230424 h 1764996"/>
+                  <a:gd name="csX2" fmla="*/ 0 w 1256087"/>
+                  <a:gd name="csY2" fmla="*/ 1160085 h 1764996"/>
+                  <a:gd name="csX3" fmla="*/ 14068 w 1256087"/>
+                  <a:gd name="csY3" fmla="*/ 738055 h 1764996"/>
+                  <a:gd name="csX4" fmla="*/ 28135 w 1256087"/>
+                  <a:gd name="csY4" fmla="*/ 695852 h 1764996"/>
+                  <a:gd name="csX5" fmla="*/ 84406 w 1256087"/>
+                  <a:gd name="csY5" fmla="*/ 611445 h 1764996"/>
+                  <a:gd name="csX6" fmla="*/ 98474 w 1256087"/>
+                  <a:gd name="csY6" fmla="*/ 484836 h 1764996"/>
+                  <a:gd name="csX7" fmla="*/ 126609 w 1256087"/>
+                  <a:gd name="csY7" fmla="*/ 231618 h 1764996"/>
+                  <a:gd name="csX8" fmla="*/ 154745 w 1256087"/>
+                  <a:gd name="csY8" fmla="*/ 147212 h 1764996"/>
+                  <a:gd name="csX9" fmla="*/ 182880 w 1256087"/>
+                  <a:gd name="csY9" fmla="*/ 119076 h 1764996"/>
+                  <a:gd name="csX10" fmla="*/ 211015 w 1256087"/>
+                  <a:gd name="csY10" fmla="*/ 76873 h 1764996"/>
+                  <a:gd name="csX11" fmla="*/ 295421 w 1256087"/>
+                  <a:gd name="csY11" fmla="*/ 34670 h 1764996"/>
+                  <a:gd name="csX12" fmla="*/ 323557 w 1256087"/>
+                  <a:gd name="csY12" fmla="*/ 6535 h 1764996"/>
+                  <a:gd name="csX13" fmla="*/ 661181 w 1256087"/>
+                  <a:gd name="csY13" fmla="*/ 34670 h 1764996"/>
+                  <a:gd name="csX14" fmla="*/ 731520 w 1256087"/>
+                  <a:gd name="csY14" fmla="*/ 119076 h 1764996"/>
+                  <a:gd name="csX15" fmla="*/ 787791 w 1256087"/>
+                  <a:gd name="csY15" fmla="*/ 175347 h 1764996"/>
+                  <a:gd name="csX16" fmla="*/ 858129 w 1256087"/>
+                  <a:gd name="csY16" fmla="*/ 259753 h 1764996"/>
+                  <a:gd name="csX17" fmla="*/ 844061 w 1256087"/>
+                  <a:gd name="csY17" fmla="*/ 358227 h 1764996"/>
+                  <a:gd name="csX18" fmla="*/ 815926 w 1256087"/>
+                  <a:gd name="csY18" fmla="*/ 400430 h 1764996"/>
+                  <a:gd name="csX19" fmla="*/ 787791 w 1256087"/>
+                  <a:gd name="csY19" fmla="*/ 498904 h 1764996"/>
+                  <a:gd name="csX20" fmla="*/ 787791 w 1256087"/>
+                  <a:gd name="csY20" fmla="*/ 780258 h 1764996"/>
+                  <a:gd name="csX21" fmla="*/ 900332 w 1256087"/>
+                  <a:gd name="csY21" fmla="*/ 878732 h 1764996"/>
+                  <a:gd name="csX22" fmla="*/ 970671 w 1256087"/>
+                  <a:gd name="csY22" fmla="*/ 935002 h 1764996"/>
+                  <a:gd name="csX23" fmla="*/ 1083212 w 1256087"/>
+                  <a:gd name="csY23" fmla="*/ 1019408 h 1764996"/>
+                  <a:gd name="csX24" fmla="*/ 1125415 w 1256087"/>
+                  <a:gd name="csY24" fmla="*/ 1047544 h 1764996"/>
+                  <a:gd name="csX25" fmla="*/ 1209821 w 1256087"/>
+                  <a:gd name="csY25" fmla="*/ 1103815 h 1764996"/>
+                  <a:gd name="csX26" fmla="*/ 1237957 w 1256087"/>
+                  <a:gd name="csY26" fmla="*/ 1131950 h 1764996"/>
+                  <a:gd name="csX27" fmla="*/ 1237957 w 1256087"/>
+                  <a:gd name="csY27" fmla="*/ 1385168 h 1764996"/>
+                  <a:gd name="csX28" fmla="*/ 1083212 w 1256087"/>
+                  <a:gd name="csY28" fmla="*/ 1483642 h 1764996"/>
+                  <a:gd name="csX29" fmla="*/ 1041009 w 1256087"/>
+                  <a:gd name="csY29" fmla="*/ 1497710 h 1764996"/>
+                  <a:gd name="csX30" fmla="*/ 956603 w 1256087"/>
+                  <a:gd name="csY30" fmla="*/ 1568048 h 1764996"/>
+                  <a:gd name="csX31" fmla="*/ 900332 w 1256087"/>
+                  <a:gd name="csY31" fmla="*/ 1624319 h 1764996"/>
+                  <a:gd name="csX32" fmla="*/ 815926 w 1256087"/>
+                  <a:gd name="csY32" fmla="*/ 1680590 h 1764996"/>
+                  <a:gd name="csX33" fmla="*/ 773723 w 1256087"/>
+                  <a:gd name="csY33" fmla="*/ 1722793 h 1764996"/>
+                  <a:gd name="csX34" fmla="*/ 717452 w 1256087"/>
+                  <a:gd name="csY34" fmla="*/ 1736861 h 1764996"/>
+                  <a:gd name="csX35" fmla="*/ 661181 w 1256087"/>
+                  <a:gd name="csY35" fmla="*/ 1764996 h 1764996"/>
+                  <a:gd name="csX36" fmla="*/ 492369 w 1256087"/>
+                  <a:gd name="csY36" fmla="*/ 1750928 h 1764996"/>
+                  <a:gd name="csX37" fmla="*/ 407963 w 1256087"/>
+                  <a:gd name="csY37" fmla="*/ 1694658 h 1764996"/>
+                  <a:gd name="csX38" fmla="*/ 365760 w 1256087"/>
+                  <a:gd name="csY38" fmla="*/ 1666522 h 1764996"/>
+                  <a:gd name="csX39" fmla="*/ 281354 w 1256087"/>
+                  <a:gd name="csY39" fmla="*/ 1652455 h 1764996"/>
+                  <a:gd name="csX40" fmla="*/ 211015 w 1256087"/>
+                  <a:gd name="csY40" fmla="*/ 1596184 h 1764996"/>
+                  <a:gd name="csX41" fmla="*/ 168812 w 1256087"/>
+                  <a:gd name="csY41" fmla="*/ 1525845 h 1764996"/>
+                  <a:gd name="csX42" fmla="*/ 154745 w 1256087"/>
+                  <a:gd name="csY42" fmla="*/ 1413304 h 1764996"/>
+                  <a:gd name="csX43" fmla="*/ 98474 w 1256087"/>
+                  <a:gd name="csY43" fmla="*/ 1342965 h 1764996"/>
+                  <a:gd name="csX44" fmla="*/ 56271 w 1256087"/>
+                  <a:gd name="csY44" fmla="*/ 1328898 h 1764996"/>
+                  <a:gd name="csX45" fmla="*/ 42203 w 1256087"/>
+                  <a:gd name="csY45" fmla="*/ 1342965 h 1764996"/>
+                </a:gdLst>
+                <a:ahLst/>
+                <a:cxnLst>
+                  <a:cxn ang="0">
+                    <a:pos x="csX0" y="csY0"/>
+                  </a:cxn>
+                  <a:cxn ang="0">
+                    <a:pos x="csX1" y="csY1"/>
+                  </a:cxn>
+                  <a:cxn ang="0">
+                    <a:pos x="csX2" y="csY2"/>
+                  </a:cxn>
+                  <a:cxn ang="0">
+                    <a:pos x="csX3" y="csY3"/>
+                  </a:cxn>
+                  <a:cxn ang="0">
+                    <a:pos x="csX4" y="csY4"/>
+                  </a:cxn>
+                  <a:cxn ang="0">
+                    <a:pos x="csX5" y="csY5"/>
+                  </a:cxn>
+                  <a:cxn ang="0">
+                    <a:pos x="csX6" y="csY6"/>
+                  </a:cxn>
+                  <a:cxn ang="0">
+                    <a:pos x="csX7" y="csY7"/>
+                  </a:cxn>
+                  <a:cxn ang="0">
+                    <a:pos x="csX8" y="csY8"/>
+                  </a:cxn>
+                  <a:cxn ang="0">
+                    <a:pos x="csX9" y="csY9"/>
+                  </a:cxn>
+                  <a:cxn ang="0">
+                    <a:pos x="csX10" y="csY10"/>
+                  </a:cxn>
+                  <a:cxn ang="0">
+                    <a:pos x="csX11" y="csY11"/>
+                  </a:cxn>
+                  <a:cxn ang="0">
+                    <a:pos x="csX12" y="csY12"/>
+                  </a:cxn>
+                  <a:cxn ang="0">
+                    <a:pos x="csX13" y="csY13"/>
+                  </a:cxn>
+                  <a:cxn ang="0">
+                    <a:pos x="csX14" y="csY14"/>
+                  </a:cxn>
+                  <a:cxn ang="0">
+                    <a:pos x="csX15" y="csY15"/>
+                  </a:cxn>
+                  <a:cxn ang="0">
+                    <a:pos x="csX16" y="csY16"/>
+                  </a:cxn>
+                  <a:cxn ang="0">
+                    <a:pos x="csX17" y="csY17"/>
+                  </a:cxn>
+                  <a:cxn ang="0">
+                    <a:pos x="csX18" y="csY18"/>
+                  </a:cxn>
+                  <a:cxn ang="0">
+                    <a:pos x="csX19" y="csY19"/>
+                  </a:cxn>
+                  <a:cxn ang="0">
+                    <a:pos x="csX20" y="csY20"/>
+                  </a:cxn>
+                  <a:cxn ang="0">
+                    <a:pos x="csX21" y="csY21"/>
+                  </a:cxn>
+                  <a:cxn ang="0">
+                    <a:pos x="csX22" y="csY22"/>
+                  </a:cxn>
+                  <a:cxn ang="0">
+                    <a:pos x="csX23" y="csY23"/>
+                  </a:cxn>
+                  <a:cxn ang="0">
+                    <a:pos x="csX24" y="csY24"/>
+                  </a:cxn>
+                  <a:cxn ang="0">
+                    <a:pos x="csX25" y="csY25"/>
+                  </a:cxn>
+                  <a:cxn ang="0">
+                    <a:pos x="csX26" y="csY26"/>
+                  </a:cxn>
+                  <a:cxn ang="0">
+                    <a:pos x="csX27" y="csY27"/>
+                  </a:cxn>
+                  <a:cxn ang="0">
+                    <a:pos x="csX28" y="csY28"/>
+                  </a:cxn>
+                  <a:cxn ang="0">
+                    <a:pos x="csX29" y="csY29"/>
+                  </a:cxn>
+                  <a:cxn ang="0">
+                    <a:pos x="csX30" y="csY30"/>
+                  </a:cxn>
+                  <a:cxn ang="0">
+                    <a:pos x="csX31" y="csY31"/>
+                  </a:cxn>
+                  <a:cxn ang="0">
+                    <a:pos x="csX32" y="csY32"/>
+                  </a:cxn>
+                  <a:cxn ang="0">
+                    <a:pos x="csX33" y="csY33"/>
+                  </a:cxn>
+                  <a:cxn ang="0">
+                    <a:pos x="csX34" y="csY34"/>
+                  </a:cxn>
+                  <a:cxn ang="0">
+                    <a:pos x="csX35" y="csY35"/>
+                  </a:cxn>
+                  <a:cxn ang="0">
+                    <a:pos x="csX36" y="csY36"/>
+                  </a:cxn>
+                  <a:cxn ang="0">
+                    <a:pos x="csX37" y="csY37"/>
+                  </a:cxn>
+                  <a:cxn ang="0">
+                    <a:pos x="csX38" y="csY38"/>
+                  </a:cxn>
+                  <a:cxn ang="0">
+                    <a:pos x="csX39" y="csY39"/>
+                  </a:cxn>
+                  <a:cxn ang="0">
+                    <a:pos x="csX40" y="csY40"/>
+                  </a:cxn>
+                  <a:cxn ang="0">
+                    <a:pos x="csX41" y="csY41"/>
+                  </a:cxn>
+                  <a:cxn ang="0">
+                    <a:pos x="csX42" y="csY42"/>
+                  </a:cxn>
+                  <a:cxn ang="0">
+                    <a:pos x="csX43" y="csY43"/>
+                  </a:cxn>
+                  <a:cxn ang="0">
+                    <a:pos x="csX44" y="csY44"/>
+                  </a:cxn>
+                  <a:cxn ang="0">
+                    <a:pos x="csX45" y="csY45"/>
+                  </a:cxn>
+                </a:cxnLst>
+                <a:rect l="l" t="t" r="r" b="b"/>
+                <a:pathLst>
+                  <a:path w="1256087" h="1764996">
+                    <a:moveTo>
+                      <a:pt x="42203" y="1342965"/>
+                    </a:moveTo>
+                    <a:cubicBezTo>
+                      <a:pt x="35169" y="1326553"/>
+                      <a:pt x="22763" y="1268102"/>
+                      <a:pt x="14068" y="1230424"/>
+                    </a:cubicBezTo>
+                    <a:cubicBezTo>
+                      <a:pt x="8691" y="1207126"/>
+                      <a:pt x="0" y="1183996"/>
+                      <a:pt x="0" y="1160085"/>
+                    </a:cubicBezTo>
+                    <a:cubicBezTo>
+                      <a:pt x="0" y="1019330"/>
+                      <a:pt x="5553" y="878552"/>
+                      <a:pt x="14068" y="738055"/>
+                    </a:cubicBezTo>
+                    <a:cubicBezTo>
+                      <a:pt x="14965" y="723254"/>
+                      <a:pt x="20934" y="708815"/>
+                      <a:pt x="28135" y="695852"/>
+                    </a:cubicBezTo>
+                    <a:cubicBezTo>
+                      <a:pt x="44557" y="666292"/>
+                      <a:pt x="84406" y="611445"/>
+                      <a:pt x="84406" y="611445"/>
+                    </a:cubicBezTo>
+                    <a:cubicBezTo>
+                      <a:pt x="89095" y="569242"/>
+                      <a:pt x="94249" y="527088"/>
+                      <a:pt x="98474" y="484836"/>
+                    </a:cubicBezTo>
+                    <a:cubicBezTo>
+                      <a:pt x="102831" y="441261"/>
+                      <a:pt x="113354" y="289056"/>
+                      <a:pt x="126609" y="231618"/>
+                    </a:cubicBezTo>
+                    <a:cubicBezTo>
+                      <a:pt x="133278" y="202720"/>
+                      <a:pt x="133774" y="168183"/>
+                      <a:pt x="154745" y="147212"/>
+                    </a:cubicBezTo>
+                    <a:cubicBezTo>
+                      <a:pt x="164123" y="137833"/>
+                      <a:pt x="174595" y="129433"/>
+                      <a:pt x="182880" y="119076"/>
+                    </a:cubicBezTo>
+                    <a:cubicBezTo>
+                      <a:pt x="193442" y="105874"/>
+                      <a:pt x="199060" y="88828"/>
+                      <a:pt x="211015" y="76873"/>
+                    </a:cubicBezTo>
+                    <a:cubicBezTo>
+                      <a:pt x="238285" y="49603"/>
+                      <a:pt x="261097" y="46111"/>
+                      <a:pt x="295421" y="34670"/>
+                    </a:cubicBezTo>
+                    <a:cubicBezTo>
+                      <a:pt x="304800" y="25292"/>
+                      <a:pt x="310306" y="7111"/>
+                      <a:pt x="323557" y="6535"/>
+                    </a:cubicBezTo>
+                    <a:cubicBezTo>
+                      <a:pt x="558791" y="-3693"/>
+                      <a:pt x="536733" y="-6814"/>
+                      <a:pt x="661181" y="34670"/>
+                    </a:cubicBezTo>
+                    <a:cubicBezTo>
+                      <a:pt x="807514" y="181000"/>
+                      <a:pt x="614018" y="-18010"/>
+                      <a:pt x="731520" y="119076"/>
+                    </a:cubicBezTo>
+                    <a:cubicBezTo>
+                      <a:pt x="748783" y="139216"/>
+                      <a:pt x="773077" y="153276"/>
+                      <a:pt x="787791" y="175347"/>
+                    </a:cubicBezTo>
+                    <a:cubicBezTo>
+                      <a:pt x="826961" y="234103"/>
+                      <a:pt x="803971" y="205595"/>
+                      <a:pt x="858129" y="259753"/>
+                    </a:cubicBezTo>
+                    <a:cubicBezTo>
+                      <a:pt x="853440" y="292578"/>
+                      <a:pt x="853589" y="326467"/>
+                      <a:pt x="844061" y="358227"/>
+                    </a:cubicBezTo>
+                    <a:cubicBezTo>
+                      <a:pt x="839203" y="374421"/>
+                      <a:pt x="823487" y="385308"/>
+                      <a:pt x="815926" y="400430"/>
+                    </a:cubicBezTo>
+                    <a:cubicBezTo>
+                      <a:pt x="805833" y="420616"/>
+                      <a:pt x="792299" y="480869"/>
+                      <a:pt x="787791" y="498904"/>
+                    </a:cubicBezTo>
+                    <a:cubicBezTo>
+                      <a:pt x="777924" y="607442"/>
+                      <a:pt x="761407" y="674723"/>
+                      <a:pt x="787791" y="780258"/>
+                    </a:cubicBezTo>
+                    <a:cubicBezTo>
+                      <a:pt x="801077" y="833402"/>
+                      <a:pt x="869070" y="847472"/>
+                      <a:pt x="900332" y="878732"/>
+                    </a:cubicBezTo>
+                    <a:cubicBezTo>
+                      <a:pt x="949707" y="928105"/>
+                      <a:pt x="905599" y="887677"/>
+                      <a:pt x="970671" y="935002"/>
+                    </a:cubicBezTo>
+                    <a:cubicBezTo>
+                      <a:pt x="1008594" y="962583"/>
+                      <a:pt x="1044196" y="993396"/>
+                      <a:pt x="1083212" y="1019408"/>
+                    </a:cubicBezTo>
+                    <a:cubicBezTo>
+                      <a:pt x="1097280" y="1028787"/>
+                      <a:pt x="1112426" y="1036720"/>
+                      <a:pt x="1125415" y="1047544"/>
+                    </a:cubicBezTo>
+                    <a:cubicBezTo>
+                      <a:pt x="1195665" y="1106087"/>
+                      <a:pt x="1135654" y="1079092"/>
+                      <a:pt x="1209821" y="1103815"/>
+                    </a:cubicBezTo>
+                    <a:cubicBezTo>
+                      <a:pt x="1219200" y="1113193"/>
+                      <a:pt x="1231133" y="1120577"/>
+                      <a:pt x="1237957" y="1131950"/>
+                    </a:cubicBezTo>
+                    <a:cubicBezTo>
+                      <a:pt x="1276625" y="1196395"/>
+                      <a:pt x="1242043" y="1371548"/>
+                      <a:pt x="1237957" y="1385168"/>
+                    </a:cubicBezTo>
+                    <a:cubicBezTo>
+                      <a:pt x="1217666" y="1452806"/>
+                      <a:pt x="1135555" y="1466194"/>
+                      <a:pt x="1083212" y="1483642"/>
+                    </a:cubicBezTo>
+                    <a:lnTo>
+                      <a:pt x="1041009" y="1497710"/>
+                    </a:lnTo>
+                    <a:cubicBezTo>
+                      <a:pt x="894665" y="1644054"/>
+                      <a:pt x="1093702" y="1450535"/>
+                      <a:pt x="956603" y="1568048"/>
+                    </a:cubicBezTo>
+                    <a:cubicBezTo>
+                      <a:pt x="936463" y="1585311"/>
+                      <a:pt x="922403" y="1609605"/>
+                      <a:pt x="900332" y="1624319"/>
+                    </a:cubicBezTo>
+                    <a:cubicBezTo>
+                      <a:pt x="872197" y="1643076"/>
+                      <a:pt x="839836" y="1656680"/>
+                      <a:pt x="815926" y="1680590"/>
+                    </a:cubicBezTo>
+                    <a:cubicBezTo>
+                      <a:pt x="801858" y="1694658"/>
+                      <a:pt x="790996" y="1712922"/>
+                      <a:pt x="773723" y="1722793"/>
+                    </a:cubicBezTo>
+                    <a:cubicBezTo>
+                      <a:pt x="756936" y="1732386"/>
+                      <a:pt x="735555" y="1730072"/>
+                      <a:pt x="717452" y="1736861"/>
+                    </a:cubicBezTo>
+                    <a:cubicBezTo>
+                      <a:pt x="697816" y="1744224"/>
+                      <a:pt x="679938" y="1755618"/>
+                      <a:pt x="661181" y="1764996"/>
+                    </a:cubicBezTo>
+                    <a:cubicBezTo>
+                      <a:pt x="604910" y="1760307"/>
+                      <a:pt x="546775" y="1766041"/>
+                      <a:pt x="492369" y="1750928"/>
+                    </a:cubicBezTo>
+                    <a:cubicBezTo>
+                      <a:pt x="459788" y="1741878"/>
+                      <a:pt x="436098" y="1713415"/>
+                      <a:pt x="407963" y="1694658"/>
+                    </a:cubicBezTo>
+                    <a:cubicBezTo>
+                      <a:pt x="393895" y="1685279"/>
+                      <a:pt x="382437" y="1669301"/>
+                      <a:pt x="365760" y="1666522"/>
+                    </a:cubicBezTo>
+                    <a:lnTo>
+                      <a:pt x="281354" y="1652455"/>
+                    </a:lnTo>
+                    <a:cubicBezTo>
+                      <a:pt x="262189" y="1639678"/>
+                      <a:pt x="224377" y="1618454"/>
+                      <a:pt x="211015" y="1596184"/>
+                    </a:cubicBezTo>
+                    <a:cubicBezTo>
+                      <a:pt x="156227" y="1504871"/>
+                      <a:pt x="240105" y="1597138"/>
+                      <a:pt x="168812" y="1525845"/>
+                    </a:cubicBezTo>
+                    <a:cubicBezTo>
+                      <a:pt x="164123" y="1488331"/>
+                      <a:pt x="164692" y="1449777"/>
+                      <a:pt x="154745" y="1413304"/>
+                    </a:cubicBezTo>
+                    <a:cubicBezTo>
+                      <a:pt x="150995" y="1399555"/>
+                      <a:pt x="113662" y="1352078"/>
+                      <a:pt x="98474" y="1342965"/>
+                    </a:cubicBezTo>
+                    <a:cubicBezTo>
+                      <a:pt x="85759" y="1335336"/>
+                      <a:pt x="70039" y="1334405"/>
+                      <a:pt x="56271" y="1328898"/>
+                    </a:cubicBezTo>
+                    <a:cubicBezTo>
+                      <a:pt x="46535" y="1325004"/>
+                      <a:pt x="49237" y="1359377"/>
+                      <a:pt x="42203" y="1342965"/>
+                    </a:cubicBezTo>
+                    <a:close/>
+                  </a:path>
+                </a:pathLst>
+              </a:custGeom>
+              <a:noFill/>
+              <a:ln w="41275">
+                <a:solidFill>
+                  <a:srgbClr val="92D050"/>
+                </a:solidFill>
+              </a:ln>
+            </p:spPr>
+            <p:style>
+              <a:lnRef idx="2">
+                <a:schemeClr val="accent1">
+                  <a:shade val="15000"/>
+                </a:schemeClr>
+              </a:lnRef>
+              <a:fillRef idx="1">
+                <a:schemeClr val="accent1"/>
+              </a:fillRef>
+              <a:effectRef idx="0">
+                <a:schemeClr val="accent1"/>
+              </a:effectRef>
+              <a:fontRef idx="minor">
+                <a:schemeClr val="lt1"/>
+              </a:fontRef>
+            </p:style>
+            <p:txBody>
+              <a:bodyPr rtlCol="0" anchor="ctr"/>
+              <a:lstStyle/>
+              <a:p>
+                <a:pPr algn="ctr"/>
+                <a:endParaRPr lang="en-US"/>
+              </a:p>
+            </p:txBody>
+          </p:sp>
+          <p:sp>
+            <p:nvSpPr>
+              <p:cNvPr id="75" name="Oval 74">
+                <a:extLst>
+                  <a:ext uri="{FF2B5EF4-FFF2-40B4-BE49-F238E27FC236}">
+                    <a16:creationId xmlns:a16="http://schemas.microsoft.com/office/drawing/2014/main" id="{EF27E362-00A9-8B4F-8D76-EBF2B4AFC310}"/>
+                  </a:ext>
+                </a:extLst>
+              </p:cNvPr>
+              <p:cNvSpPr/>
+              <p:nvPr/>
+            </p:nvSpPr>
+            <p:spPr>
+              <a:xfrm>
+                <a:off x="8913893" y="3136611"/>
+                <a:ext cx="169297" cy="169297"/>
+              </a:xfrm>
+              <a:prstGeom prst="ellipse">
+                <a:avLst/>
+              </a:prstGeom>
+              <a:solidFill>
+                <a:srgbClr val="FA848E"/>
+              </a:solidFill>
+              <a:ln>
+                <a:solidFill>
+                  <a:schemeClr val="tx1"/>
+                </a:solidFill>
+              </a:ln>
+            </p:spPr>
+            <p:style>
+              <a:lnRef idx="2">
+                <a:schemeClr val="accent1">
+                  <a:shade val="15000"/>
+                </a:schemeClr>
+              </a:lnRef>
+              <a:fillRef idx="1">
+                <a:schemeClr val="accent1"/>
+              </a:fillRef>
+              <a:effectRef idx="0">
+                <a:schemeClr val="accent1"/>
+              </a:effectRef>
+              <a:fontRef idx="minor">
+                <a:schemeClr val="lt1"/>
+              </a:fontRef>
+            </p:style>
+            <p:txBody>
+              <a:bodyPr rtlCol="0" anchor="ctr"/>
+              <a:lstStyle/>
+              <a:p>
+                <a:pPr algn="ctr"/>
+                <a:endParaRPr lang="en-US"/>
+              </a:p>
+            </p:txBody>
+          </p:sp>
+          <p:sp>
+            <p:nvSpPr>
+              <p:cNvPr id="76" name="Oval 75">
+                <a:extLst>
+                  <a:ext uri="{FF2B5EF4-FFF2-40B4-BE49-F238E27FC236}">
+                    <a16:creationId xmlns:a16="http://schemas.microsoft.com/office/drawing/2014/main" id="{1D59DF76-E2D0-3593-FB9D-C5B073490649}"/>
+                  </a:ext>
+                </a:extLst>
+              </p:cNvPr>
+              <p:cNvSpPr/>
+              <p:nvPr/>
+            </p:nvSpPr>
+            <p:spPr>
+              <a:xfrm>
+                <a:off x="9315709" y="3552089"/>
+                <a:ext cx="169297" cy="169297"/>
+              </a:xfrm>
+              <a:prstGeom prst="ellipse">
+                <a:avLst/>
+              </a:prstGeom>
+              <a:solidFill>
+                <a:srgbClr val="FA848E"/>
+              </a:solidFill>
+              <a:ln>
+                <a:solidFill>
+                  <a:schemeClr val="tx1"/>
+                </a:solidFill>
+              </a:ln>
+            </p:spPr>
+            <p:style>
+              <a:lnRef idx="2">
+                <a:schemeClr val="accent1">
+                  <a:shade val="15000"/>
+                </a:schemeClr>
+              </a:lnRef>
+              <a:fillRef idx="1">
+                <a:schemeClr val="accent1"/>
+              </a:fillRef>
+              <a:effectRef idx="0">
+                <a:schemeClr val="accent1"/>
+              </a:effectRef>
+              <a:fontRef idx="minor">
+                <a:schemeClr val="lt1"/>
+              </a:fontRef>
+            </p:style>
+            <p:txBody>
+              <a:bodyPr rtlCol="0" anchor="ctr"/>
+              <a:lstStyle/>
+              <a:p>
+                <a:pPr algn="ctr"/>
+                <a:endParaRPr lang="en-US"/>
+              </a:p>
+            </p:txBody>
+          </p:sp>
+          <p:sp>
+            <p:nvSpPr>
+              <p:cNvPr id="77" name="Oval 76">
+                <a:extLst>
+                  <a:ext uri="{FF2B5EF4-FFF2-40B4-BE49-F238E27FC236}">
+                    <a16:creationId xmlns:a16="http://schemas.microsoft.com/office/drawing/2014/main" id="{16C47019-F797-51EE-3B0C-124459FF0537}"/>
+                  </a:ext>
+                </a:extLst>
+              </p:cNvPr>
+              <p:cNvSpPr/>
+              <p:nvPr/>
+            </p:nvSpPr>
+            <p:spPr>
+              <a:xfrm>
+                <a:off x="9561919" y="4148997"/>
+                <a:ext cx="169297" cy="169297"/>
+              </a:xfrm>
+              <a:prstGeom prst="ellipse">
+                <a:avLst/>
+              </a:prstGeom>
+              <a:solidFill>
+                <a:srgbClr val="FA848E"/>
+              </a:solidFill>
+              <a:ln>
+                <a:solidFill>
+                  <a:schemeClr val="tx1"/>
+                </a:solidFill>
+              </a:ln>
+            </p:spPr>
+            <p:style>
+              <a:lnRef idx="2">
+                <a:schemeClr val="accent1">
+                  <a:shade val="15000"/>
+                </a:schemeClr>
+              </a:lnRef>
+              <a:fillRef idx="1">
+                <a:schemeClr val="accent1"/>
+              </a:fillRef>
+              <a:effectRef idx="0">
+                <a:schemeClr val="accent1"/>
+              </a:effectRef>
+              <a:fontRef idx="minor">
+                <a:schemeClr val="lt1"/>
+              </a:fontRef>
+            </p:style>
+            <p:txBody>
+              <a:bodyPr rtlCol="0" anchor="ctr"/>
+              <a:lstStyle/>
+              <a:p>
+                <a:pPr algn="ctr"/>
+                <a:endParaRPr lang="en-US"/>
+              </a:p>
+            </p:txBody>
+          </p:sp>
+          <p:sp>
+            <p:nvSpPr>
+              <p:cNvPr id="78" name="Oval 77">
+                <a:extLst>
+                  <a:ext uri="{FF2B5EF4-FFF2-40B4-BE49-F238E27FC236}">
+                    <a16:creationId xmlns:a16="http://schemas.microsoft.com/office/drawing/2014/main" id="{224B94E7-B13E-B0C9-4931-2E9E9351F563}"/>
+                  </a:ext>
+                </a:extLst>
+              </p:cNvPr>
+              <p:cNvSpPr/>
+              <p:nvPr/>
+            </p:nvSpPr>
+            <p:spPr>
+              <a:xfrm>
+                <a:off x="9436881" y="4757848"/>
+                <a:ext cx="169297" cy="169297"/>
+              </a:xfrm>
+              <a:prstGeom prst="ellipse">
+                <a:avLst/>
+              </a:prstGeom>
+              <a:solidFill>
+                <a:srgbClr val="FA848E"/>
+              </a:solidFill>
+              <a:ln>
+                <a:solidFill>
+                  <a:schemeClr val="tx1"/>
+                </a:solidFill>
+              </a:ln>
+            </p:spPr>
+            <p:style>
+              <a:lnRef idx="2">
+                <a:schemeClr val="accent1">
+                  <a:shade val="15000"/>
+                </a:schemeClr>
+              </a:lnRef>
+              <a:fillRef idx="1">
+                <a:schemeClr val="accent1"/>
+              </a:fillRef>
+              <a:effectRef idx="0">
+                <a:schemeClr val="accent1"/>
+              </a:effectRef>
+              <a:fontRef idx="minor">
+                <a:schemeClr val="lt1"/>
+              </a:fontRef>
+            </p:style>
+            <p:txBody>
+              <a:bodyPr rtlCol="0" anchor="ctr"/>
+              <a:lstStyle/>
+              <a:p>
+                <a:pPr algn="ctr"/>
+                <a:endParaRPr lang="en-US"/>
+              </a:p>
+            </p:txBody>
+          </p:sp>
+          <p:sp>
+            <p:nvSpPr>
+              <p:cNvPr id="79" name="Oval 78">
+                <a:extLst>
+                  <a:ext uri="{FF2B5EF4-FFF2-40B4-BE49-F238E27FC236}">
+                    <a16:creationId xmlns:a16="http://schemas.microsoft.com/office/drawing/2014/main" id="{6E14AC5E-FC60-9BFC-C8E7-148908E90F06}"/>
+                  </a:ext>
+                </a:extLst>
+              </p:cNvPr>
+              <p:cNvSpPr/>
+              <p:nvPr/>
+            </p:nvSpPr>
+            <p:spPr>
+              <a:xfrm>
+                <a:off x="8913892" y="5228622"/>
+                <a:ext cx="169297" cy="169297"/>
+              </a:xfrm>
+              <a:prstGeom prst="ellipse">
+                <a:avLst/>
+              </a:prstGeom>
+              <a:solidFill>
+                <a:srgbClr val="FA848E"/>
+              </a:solidFill>
+              <a:ln>
+                <a:solidFill>
+                  <a:schemeClr val="tx1"/>
+                </a:solidFill>
+              </a:ln>
+            </p:spPr>
+            <p:style>
+              <a:lnRef idx="2">
+                <a:schemeClr val="accent1">
+                  <a:shade val="15000"/>
+                </a:schemeClr>
+              </a:lnRef>
+              <a:fillRef idx="1">
+                <a:schemeClr val="accent1"/>
+              </a:fillRef>
+              <a:effectRef idx="0">
+                <a:schemeClr val="accent1"/>
+              </a:effectRef>
+              <a:fontRef idx="minor">
+                <a:schemeClr val="lt1"/>
+              </a:fontRef>
+            </p:style>
+            <p:txBody>
+              <a:bodyPr rtlCol="0" anchor="ctr"/>
+              <a:lstStyle/>
+              <a:p>
+                <a:pPr algn="ctr"/>
+                <a:endParaRPr lang="en-US"/>
+              </a:p>
+            </p:txBody>
+          </p:sp>
+          <p:sp>
+            <p:nvSpPr>
+              <p:cNvPr id="80" name="Oval 79">
+                <a:extLst>
+                  <a:ext uri="{FF2B5EF4-FFF2-40B4-BE49-F238E27FC236}">
+                    <a16:creationId xmlns:a16="http://schemas.microsoft.com/office/drawing/2014/main" id="{B3A89B57-477E-C045-935C-A001BE36B29E}"/>
+                  </a:ext>
+                </a:extLst>
+              </p:cNvPr>
+              <p:cNvSpPr/>
+              <p:nvPr/>
+            </p:nvSpPr>
+            <p:spPr>
+              <a:xfrm>
+                <a:off x="8210706" y="5433134"/>
+                <a:ext cx="169297" cy="169297"/>
+              </a:xfrm>
+              <a:prstGeom prst="ellipse">
+                <a:avLst/>
+              </a:prstGeom>
+              <a:solidFill>
+                <a:srgbClr val="FA848E"/>
+              </a:solidFill>
+              <a:ln>
+                <a:solidFill>
+                  <a:schemeClr val="tx1"/>
+                </a:solidFill>
+              </a:ln>
+            </p:spPr>
+            <p:style>
+              <a:lnRef idx="2">
+                <a:schemeClr val="accent1">
+                  <a:shade val="15000"/>
+                </a:schemeClr>
+              </a:lnRef>
+              <a:fillRef idx="1">
+                <a:schemeClr val="accent1"/>
+              </a:fillRef>
+              <a:effectRef idx="0">
+                <a:schemeClr val="accent1"/>
+              </a:effectRef>
+              <a:fontRef idx="minor">
+                <a:schemeClr val="lt1"/>
+              </a:fontRef>
+            </p:style>
+            <p:txBody>
+              <a:bodyPr rtlCol="0" anchor="ctr"/>
+              <a:lstStyle/>
+              <a:p>
+                <a:pPr algn="ctr"/>
+                <a:endParaRPr lang="en-US"/>
+              </a:p>
+            </p:txBody>
+          </p:sp>
+          <p:sp>
+            <p:nvSpPr>
+              <p:cNvPr id="81" name="Oval 80">
+                <a:extLst>
+                  <a:ext uri="{FF2B5EF4-FFF2-40B4-BE49-F238E27FC236}">
+                    <a16:creationId xmlns:a16="http://schemas.microsoft.com/office/drawing/2014/main" id="{D431CB32-7CD0-7439-5480-C76EA37D1D5F}"/>
+                  </a:ext>
+                </a:extLst>
+              </p:cNvPr>
+              <p:cNvSpPr/>
+              <p:nvPr/>
+            </p:nvSpPr>
+            <p:spPr>
+              <a:xfrm>
+                <a:off x="7600129" y="5137442"/>
+                <a:ext cx="169297" cy="169297"/>
+              </a:xfrm>
+              <a:prstGeom prst="ellipse">
+                <a:avLst/>
+              </a:prstGeom>
+              <a:solidFill>
+                <a:srgbClr val="FA848E"/>
+              </a:solidFill>
+              <a:ln>
+                <a:solidFill>
+                  <a:schemeClr val="tx1"/>
+                </a:solidFill>
+              </a:ln>
+            </p:spPr>
+            <p:style>
+              <a:lnRef idx="2">
+                <a:schemeClr val="accent1">
+                  <a:shade val="15000"/>
+                </a:schemeClr>
+              </a:lnRef>
+              <a:fillRef idx="1">
+                <a:schemeClr val="accent1"/>
+              </a:fillRef>
+              <a:effectRef idx="0">
+                <a:schemeClr val="accent1"/>
+              </a:effectRef>
+              <a:fontRef idx="minor">
+                <a:schemeClr val="lt1"/>
+              </a:fontRef>
+            </p:style>
+            <p:txBody>
+              <a:bodyPr rtlCol="0" anchor="ctr"/>
+              <a:lstStyle/>
+              <a:p>
+                <a:pPr algn="ctr"/>
+                <a:endParaRPr lang="en-US"/>
+              </a:p>
+            </p:txBody>
+          </p:sp>
+          <p:sp>
+            <p:nvSpPr>
+              <p:cNvPr id="82" name="Oval 81">
+                <a:extLst>
+                  <a:ext uri="{FF2B5EF4-FFF2-40B4-BE49-F238E27FC236}">
+                    <a16:creationId xmlns:a16="http://schemas.microsoft.com/office/drawing/2014/main" id="{CA7B4961-D38F-2C81-0877-2221C10F7A1C}"/>
+                  </a:ext>
+                </a:extLst>
+              </p:cNvPr>
+              <p:cNvSpPr/>
+              <p:nvPr/>
+            </p:nvSpPr>
+            <p:spPr>
+              <a:xfrm>
+                <a:off x="7342315" y="4379058"/>
+                <a:ext cx="169297" cy="169297"/>
+              </a:xfrm>
+              <a:prstGeom prst="ellipse">
+                <a:avLst/>
+              </a:prstGeom>
+              <a:solidFill>
+                <a:srgbClr val="FA848E"/>
+              </a:solidFill>
+              <a:ln>
+                <a:solidFill>
+                  <a:schemeClr val="tx1"/>
+                </a:solidFill>
+              </a:ln>
+            </p:spPr>
+            <p:style>
+              <a:lnRef idx="2">
+                <a:schemeClr val="accent1">
+                  <a:shade val="15000"/>
+                </a:schemeClr>
+              </a:lnRef>
+              <a:fillRef idx="1">
+                <a:schemeClr val="accent1"/>
+              </a:fillRef>
+              <a:effectRef idx="0">
+                <a:schemeClr val="accent1"/>
+              </a:effectRef>
+              <a:fontRef idx="minor">
+                <a:schemeClr val="lt1"/>
+              </a:fontRef>
+            </p:style>
+            <p:txBody>
+              <a:bodyPr rtlCol="0" anchor="ctr"/>
+              <a:lstStyle/>
+              <a:p>
+                <a:pPr algn="ctr"/>
+                <a:endParaRPr lang="en-US"/>
+              </a:p>
+            </p:txBody>
+          </p:sp>
+          <p:sp>
+            <p:nvSpPr>
+              <p:cNvPr id="83" name="Oval 82">
+                <a:extLst>
+                  <a:ext uri="{FF2B5EF4-FFF2-40B4-BE49-F238E27FC236}">
+                    <a16:creationId xmlns:a16="http://schemas.microsoft.com/office/drawing/2014/main" id="{8C83A6FB-D336-5B30-D1AF-040E68443636}"/>
+                  </a:ext>
+                </a:extLst>
+              </p:cNvPr>
+              <p:cNvSpPr/>
+              <p:nvPr/>
+            </p:nvSpPr>
+            <p:spPr>
+              <a:xfrm>
+                <a:off x="7444204" y="3600910"/>
+                <a:ext cx="169297" cy="169297"/>
+              </a:xfrm>
+              <a:prstGeom prst="ellipse">
+                <a:avLst/>
+              </a:prstGeom>
+              <a:solidFill>
+                <a:srgbClr val="FA848E"/>
+              </a:solidFill>
+              <a:ln>
+                <a:solidFill>
+                  <a:schemeClr val="tx1"/>
+                </a:solidFill>
+              </a:ln>
+            </p:spPr>
+            <p:style>
+              <a:lnRef idx="2">
+                <a:schemeClr val="accent1">
+                  <a:shade val="15000"/>
+                </a:schemeClr>
+              </a:lnRef>
+              <a:fillRef idx="1">
+                <a:schemeClr val="accent1"/>
+              </a:fillRef>
+              <a:effectRef idx="0">
+                <a:schemeClr val="accent1"/>
+              </a:effectRef>
+              <a:fontRef idx="minor">
+                <a:schemeClr val="lt1"/>
+              </a:fontRef>
+            </p:style>
+            <p:txBody>
+              <a:bodyPr rtlCol="0" anchor="ctr"/>
+              <a:lstStyle/>
+              <a:p>
+                <a:pPr algn="ctr"/>
+                <a:endParaRPr lang="en-US"/>
+              </a:p>
+            </p:txBody>
+          </p:sp>
+          <p:sp>
+            <p:nvSpPr>
+              <p:cNvPr id="84" name="Oval 83">
+                <a:extLst>
+                  <a:ext uri="{FF2B5EF4-FFF2-40B4-BE49-F238E27FC236}">
+                    <a16:creationId xmlns:a16="http://schemas.microsoft.com/office/drawing/2014/main" id="{D58EC2B2-32BA-6596-D2D7-076B734110CF}"/>
+                  </a:ext>
+                </a:extLst>
+              </p:cNvPr>
+              <p:cNvSpPr/>
+              <p:nvPr/>
+            </p:nvSpPr>
+            <p:spPr>
+              <a:xfrm>
+                <a:off x="7913913" y="3106145"/>
+                <a:ext cx="169297" cy="169297"/>
+              </a:xfrm>
+              <a:prstGeom prst="ellipse">
+                <a:avLst/>
+              </a:prstGeom>
+              <a:solidFill>
+                <a:srgbClr val="FA848E"/>
+              </a:solidFill>
+              <a:ln>
+                <a:solidFill>
+                  <a:schemeClr val="tx1"/>
+                </a:solidFill>
+              </a:ln>
+            </p:spPr>
+            <p:style>
+              <a:lnRef idx="2">
+                <a:schemeClr val="accent1">
+                  <a:shade val="15000"/>
+                </a:schemeClr>
+              </a:lnRef>
+              <a:fillRef idx="1">
+                <a:schemeClr val="accent1"/>
+              </a:fillRef>
+              <a:effectRef idx="0">
+                <a:schemeClr val="accent1"/>
+              </a:effectRef>
+              <a:fontRef idx="minor">
+                <a:schemeClr val="lt1"/>
+              </a:fontRef>
+            </p:style>
+            <p:txBody>
+              <a:bodyPr rtlCol="0" anchor="ctr"/>
+              <a:lstStyle/>
+              <a:p>
+                <a:pPr algn="ctr"/>
+                <a:endParaRPr lang="en-US"/>
+              </a:p>
+            </p:txBody>
+          </p:sp>
+          <p:sp>
+            <p:nvSpPr>
+              <p:cNvPr id="85" name="Oval 84">
+                <a:extLst>
+                  <a:ext uri="{FF2B5EF4-FFF2-40B4-BE49-F238E27FC236}">
+                    <a16:creationId xmlns:a16="http://schemas.microsoft.com/office/drawing/2014/main" id="{1C827D1C-1D8D-8124-15FC-7BBFAF1FA313}"/>
+                  </a:ext>
+                </a:extLst>
+              </p:cNvPr>
+              <p:cNvSpPr/>
+              <p:nvPr/>
+            </p:nvSpPr>
+            <p:spPr>
+              <a:xfrm>
+                <a:off x="8675566" y="4002022"/>
+                <a:ext cx="169297" cy="169297"/>
+              </a:xfrm>
+              <a:prstGeom prst="ellipse">
+                <a:avLst/>
+              </a:prstGeom>
+              <a:solidFill>
+                <a:srgbClr val="92D050"/>
+              </a:solidFill>
+              <a:ln>
+                <a:solidFill>
+                  <a:schemeClr val="tx1"/>
+                </a:solidFill>
+              </a:ln>
+            </p:spPr>
+            <p:style>
+              <a:lnRef idx="2">
+                <a:schemeClr val="accent1">
+                  <a:shade val="15000"/>
+                </a:schemeClr>
+              </a:lnRef>
+              <a:fillRef idx="1">
+                <a:schemeClr val="accent1"/>
+              </a:fillRef>
+              <a:effectRef idx="0">
+                <a:schemeClr val="accent1"/>
+              </a:effectRef>
+              <a:fontRef idx="minor">
+                <a:schemeClr val="lt1"/>
+              </a:fontRef>
+            </p:style>
+            <p:txBody>
+              <a:bodyPr rtlCol="0" anchor="ctr"/>
+              <a:lstStyle/>
+              <a:p>
+                <a:pPr algn="ctr"/>
+                <a:endParaRPr lang="en-US"/>
+              </a:p>
+            </p:txBody>
+          </p:sp>
+          <p:sp>
+            <p:nvSpPr>
+              <p:cNvPr id="86" name="Oval 85">
+                <a:extLst>
+                  <a:ext uri="{FF2B5EF4-FFF2-40B4-BE49-F238E27FC236}">
+                    <a16:creationId xmlns:a16="http://schemas.microsoft.com/office/drawing/2014/main" id="{B3DF6A39-E3AF-DA9F-21CB-2B2CE47DD0C9}"/>
+                  </a:ext>
+                </a:extLst>
+              </p:cNvPr>
+              <p:cNvSpPr/>
+              <p:nvPr/>
+            </p:nvSpPr>
+            <p:spPr>
+              <a:xfrm>
+                <a:off x="8667527" y="3458762"/>
+                <a:ext cx="169297" cy="169297"/>
+              </a:xfrm>
+              <a:prstGeom prst="ellipse">
+                <a:avLst/>
+              </a:prstGeom>
+              <a:solidFill>
+                <a:srgbClr val="92D050"/>
+              </a:solidFill>
+              <a:ln>
+                <a:solidFill>
+                  <a:schemeClr val="tx1"/>
+                </a:solidFill>
+              </a:ln>
+            </p:spPr>
+            <p:style>
+              <a:lnRef idx="2">
+                <a:schemeClr val="accent1">
+                  <a:shade val="15000"/>
+                </a:schemeClr>
+              </a:lnRef>
+              <a:fillRef idx="1">
+                <a:schemeClr val="accent1"/>
+              </a:fillRef>
+              <a:effectRef idx="0">
+                <a:schemeClr val="accent1"/>
+              </a:effectRef>
+              <a:fontRef idx="minor">
+                <a:schemeClr val="lt1"/>
+              </a:fontRef>
+            </p:style>
+            <p:txBody>
+              <a:bodyPr rtlCol="0" anchor="ctr"/>
+              <a:lstStyle/>
+              <a:p>
+                <a:pPr algn="ctr"/>
+                <a:endParaRPr lang="en-US"/>
+              </a:p>
+            </p:txBody>
+          </p:sp>
+          <p:sp>
+            <p:nvSpPr>
+              <p:cNvPr id="87" name="Oval 86">
+                <a:extLst>
+                  <a:ext uri="{FF2B5EF4-FFF2-40B4-BE49-F238E27FC236}">
+                    <a16:creationId xmlns:a16="http://schemas.microsoft.com/office/drawing/2014/main" id="{35A7B8DA-9212-98D7-A82C-9CB2A1A2067B}"/>
+                  </a:ext>
+                </a:extLst>
+              </p:cNvPr>
+              <p:cNvSpPr/>
+              <p:nvPr/>
+            </p:nvSpPr>
+            <p:spPr>
+              <a:xfrm>
+                <a:off x="8058032" y="3312637"/>
+                <a:ext cx="169297" cy="169297"/>
+              </a:xfrm>
+              <a:prstGeom prst="ellipse">
+                <a:avLst/>
+              </a:prstGeom>
+              <a:solidFill>
+                <a:srgbClr val="92D050"/>
+              </a:solidFill>
+              <a:ln>
+                <a:solidFill>
+                  <a:schemeClr val="tx1"/>
+                </a:solidFill>
+              </a:ln>
+            </p:spPr>
+            <p:style>
+              <a:lnRef idx="2">
+                <a:schemeClr val="accent1">
+                  <a:shade val="15000"/>
+                </a:schemeClr>
+              </a:lnRef>
+              <a:fillRef idx="1">
+                <a:schemeClr val="accent1"/>
+              </a:fillRef>
+              <a:effectRef idx="0">
+                <a:schemeClr val="accent1"/>
+              </a:effectRef>
+              <a:fontRef idx="minor">
+                <a:schemeClr val="lt1"/>
+              </a:fontRef>
+            </p:style>
+            <p:txBody>
+              <a:bodyPr rtlCol="0" anchor="ctr"/>
+              <a:lstStyle/>
+              <a:p>
+                <a:pPr algn="ctr"/>
+                <a:endParaRPr lang="en-US"/>
+              </a:p>
+            </p:txBody>
+          </p:sp>
+          <p:sp>
+            <p:nvSpPr>
+              <p:cNvPr id="88" name="Oval 87">
+                <a:extLst>
+                  <a:ext uri="{FF2B5EF4-FFF2-40B4-BE49-F238E27FC236}">
+                    <a16:creationId xmlns:a16="http://schemas.microsoft.com/office/drawing/2014/main" id="{ECC2A27A-8713-F057-5284-2B61C2A5B253}"/>
+                  </a:ext>
+                </a:extLst>
+              </p:cNvPr>
+              <p:cNvSpPr/>
+              <p:nvPr/>
+            </p:nvSpPr>
+            <p:spPr>
+              <a:xfrm>
+                <a:off x="7895706" y="3670602"/>
+                <a:ext cx="169297" cy="169297"/>
+              </a:xfrm>
+              <a:prstGeom prst="ellipse">
+                <a:avLst/>
+              </a:prstGeom>
+              <a:solidFill>
+                <a:srgbClr val="92D050"/>
+              </a:solidFill>
+              <a:ln>
+                <a:solidFill>
+                  <a:schemeClr val="tx1"/>
+                </a:solidFill>
+              </a:ln>
+            </p:spPr>
+            <p:style>
+              <a:lnRef idx="2">
+                <a:schemeClr val="accent1">
+                  <a:shade val="15000"/>
+                </a:schemeClr>
+              </a:lnRef>
+              <a:fillRef idx="1">
+                <a:schemeClr val="accent1"/>
+              </a:fillRef>
+              <a:effectRef idx="0">
+                <a:schemeClr val="accent1"/>
+              </a:effectRef>
+              <a:fontRef idx="minor">
+                <a:schemeClr val="lt1"/>
+              </a:fontRef>
+            </p:style>
+            <p:txBody>
+              <a:bodyPr rtlCol="0" anchor="ctr"/>
+              <a:lstStyle/>
+              <a:p>
+                <a:pPr algn="ctr"/>
+                <a:endParaRPr lang="en-US"/>
+              </a:p>
+            </p:txBody>
+          </p:sp>
+          <p:sp>
+            <p:nvSpPr>
+              <p:cNvPr id="89" name="Oval 88">
+                <a:extLst>
+                  <a:ext uri="{FF2B5EF4-FFF2-40B4-BE49-F238E27FC236}">
+                    <a16:creationId xmlns:a16="http://schemas.microsoft.com/office/drawing/2014/main" id="{60BA867C-B4AE-78A9-A449-C5736752E802}"/>
+                  </a:ext>
+                </a:extLst>
+              </p:cNvPr>
+              <p:cNvSpPr/>
+              <p:nvPr/>
+            </p:nvSpPr>
+            <p:spPr>
+              <a:xfrm>
+                <a:off x="7769426" y="4278170"/>
+                <a:ext cx="169297" cy="169297"/>
+              </a:xfrm>
+              <a:prstGeom prst="ellipse">
+                <a:avLst/>
+              </a:prstGeom>
+              <a:solidFill>
+                <a:srgbClr val="92D050"/>
+              </a:solidFill>
+              <a:ln>
+                <a:solidFill>
+                  <a:schemeClr val="tx1"/>
+                </a:solidFill>
+              </a:ln>
+            </p:spPr>
+            <p:style>
+              <a:lnRef idx="2">
+                <a:schemeClr val="accent1">
+                  <a:shade val="15000"/>
+                </a:schemeClr>
+              </a:lnRef>
+              <a:fillRef idx="1">
+                <a:schemeClr val="accent1"/>
+              </a:fillRef>
+              <a:effectRef idx="0">
+                <a:schemeClr val="accent1"/>
+              </a:effectRef>
+              <a:fontRef idx="minor">
+                <a:schemeClr val="lt1"/>
+              </a:fontRef>
+            </p:style>
+            <p:txBody>
+              <a:bodyPr rtlCol="0" anchor="ctr"/>
+              <a:lstStyle/>
+              <a:p>
+                <a:pPr algn="ctr"/>
+                <a:endParaRPr lang="en-US"/>
+              </a:p>
+            </p:txBody>
+          </p:sp>
+          <p:sp>
+            <p:nvSpPr>
+              <p:cNvPr id="90" name="Oval 89">
+                <a:extLst>
+                  <a:ext uri="{FF2B5EF4-FFF2-40B4-BE49-F238E27FC236}">
+                    <a16:creationId xmlns:a16="http://schemas.microsoft.com/office/drawing/2014/main" id="{30423FF4-499C-A96A-2655-5F0995749D69}"/>
+                  </a:ext>
+                </a:extLst>
+              </p:cNvPr>
+              <p:cNvSpPr/>
+              <p:nvPr/>
+            </p:nvSpPr>
+            <p:spPr>
+              <a:xfrm>
+                <a:off x="7911546" y="4799517"/>
+                <a:ext cx="169297" cy="169297"/>
+              </a:xfrm>
+              <a:prstGeom prst="ellipse">
+                <a:avLst/>
+              </a:prstGeom>
+              <a:solidFill>
+                <a:srgbClr val="92D050"/>
+              </a:solidFill>
+              <a:ln>
+                <a:solidFill>
+                  <a:schemeClr val="tx1"/>
+                </a:solidFill>
+              </a:ln>
+            </p:spPr>
+            <p:style>
+              <a:lnRef idx="2">
+                <a:schemeClr val="accent1">
+                  <a:shade val="15000"/>
+                </a:schemeClr>
+              </a:lnRef>
+              <a:fillRef idx="1">
+                <a:schemeClr val="accent1"/>
+              </a:fillRef>
+              <a:effectRef idx="0">
+                <a:schemeClr val="accent1"/>
+              </a:effectRef>
+              <a:fontRef idx="minor">
+                <a:schemeClr val="lt1"/>
+              </a:fontRef>
+            </p:style>
+            <p:txBody>
+              <a:bodyPr rtlCol="0" anchor="ctr"/>
+              <a:lstStyle/>
+              <a:p>
+                <a:pPr algn="ctr"/>
+                <a:endParaRPr lang="en-US"/>
+              </a:p>
+            </p:txBody>
+          </p:sp>
+          <p:sp>
+            <p:nvSpPr>
+              <p:cNvPr id="91" name="Oval 90">
+                <a:extLst>
+                  <a:ext uri="{FF2B5EF4-FFF2-40B4-BE49-F238E27FC236}">
+                    <a16:creationId xmlns:a16="http://schemas.microsoft.com/office/drawing/2014/main" id="{9D77E5A9-844F-B4EF-9D48-AB9D87756041}"/>
+                  </a:ext>
+                </a:extLst>
+              </p:cNvPr>
+              <p:cNvSpPr/>
+              <p:nvPr/>
+            </p:nvSpPr>
+            <p:spPr>
+              <a:xfrm>
+                <a:off x="8261996" y="5137441"/>
+                <a:ext cx="169297" cy="169297"/>
+              </a:xfrm>
+              <a:prstGeom prst="ellipse">
+                <a:avLst/>
+              </a:prstGeom>
+              <a:solidFill>
+                <a:srgbClr val="92D050"/>
+              </a:solidFill>
+              <a:ln>
+                <a:solidFill>
+                  <a:schemeClr val="tx1"/>
+                </a:solidFill>
+              </a:ln>
+            </p:spPr>
+            <p:style>
+              <a:lnRef idx="2">
+                <a:schemeClr val="accent1">
+                  <a:shade val="15000"/>
+                </a:schemeClr>
+              </a:lnRef>
+              <a:fillRef idx="1">
+                <a:schemeClr val="accent1"/>
+              </a:fillRef>
+              <a:effectRef idx="0">
+                <a:schemeClr val="accent1"/>
+              </a:effectRef>
+              <a:fontRef idx="minor">
+                <a:schemeClr val="lt1"/>
+              </a:fontRef>
+            </p:style>
+            <p:txBody>
+              <a:bodyPr rtlCol="0" anchor="ctr"/>
+              <a:lstStyle/>
+              <a:p>
+                <a:pPr algn="ctr"/>
+                <a:endParaRPr lang="en-US"/>
+              </a:p>
+            </p:txBody>
+          </p:sp>
+          <p:sp>
+            <p:nvSpPr>
+              <p:cNvPr id="92" name="Oval 91">
+                <a:extLst>
+                  <a:ext uri="{FF2B5EF4-FFF2-40B4-BE49-F238E27FC236}">
+                    <a16:creationId xmlns:a16="http://schemas.microsoft.com/office/drawing/2014/main" id="{A4CCE8A7-DF1C-2C25-CCEF-E606E633A0F2}"/>
+                  </a:ext>
+                </a:extLst>
+              </p:cNvPr>
+              <p:cNvSpPr/>
+              <p:nvPr/>
+            </p:nvSpPr>
+            <p:spPr>
+              <a:xfrm>
+                <a:off x="8790787" y="5007614"/>
+                <a:ext cx="169297" cy="169297"/>
+              </a:xfrm>
+              <a:prstGeom prst="ellipse">
+                <a:avLst/>
+              </a:prstGeom>
+              <a:solidFill>
+                <a:srgbClr val="92D050"/>
+              </a:solidFill>
+              <a:ln>
+                <a:solidFill>
+                  <a:schemeClr val="tx1"/>
+                </a:solidFill>
+              </a:ln>
+            </p:spPr>
+            <p:style>
+              <a:lnRef idx="2">
+                <a:schemeClr val="accent1">
+                  <a:shade val="15000"/>
+                </a:schemeClr>
+              </a:lnRef>
+              <a:fillRef idx="1">
+                <a:schemeClr val="accent1"/>
+              </a:fillRef>
+              <a:effectRef idx="0">
+                <a:schemeClr val="accent1"/>
+              </a:effectRef>
+              <a:fontRef idx="minor">
+                <a:schemeClr val="lt1"/>
+              </a:fontRef>
+            </p:style>
+            <p:txBody>
+              <a:bodyPr rtlCol="0" anchor="ctr"/>
+              <a:lstStyle/>
+              <a:p>
+                <a:pPr algn="ctr"/>
+                <a:endParaRPr lang="en-US"/>
+              </a:p>
+            </p:txBody>
+          </p:sp>
+          <p:sp>
+            <p:nvSpPr>
+              <p:cNvPr id="93" name="Oval 92">
+                <a:extLst>
+                  <a:ext uri="{FF2B5EF4-FFF2-40B4-BE49-F238E27FC236}">
+                    <a16:creationId xmlns:a16="http://schemas.microsoft.com/office/drawing/2014/main" id="{A49BD0FD-99D4-9DD4-C0AB-8A5D1786798F}"/>
+                  </a:ext>
+                </a:extLst>
+              </p:cNvPr>
+              <p:cNvSpPr/>
+              <p:nvPr/>
+            </p:nvSpPr>
+            <p:spPr>
+              <a:xfrm>
+                <a:off x="9208932" y="4707061"/>
+                <a:ext cx="169297" cy="169297"/>
+              </a:xfrm>
+              <a:prstGeom prst="ellipse">
+                <a:avLst/>
+              </a:prstGeom>
+              <a:solidFill>
+                <a:srgbClr val="92D050"/>
+              </a:solidFill>
+              <a:ln>
+                <a:solidFill>
+                  <a:schemeClr val="tx1"/>
+                </a:solidFill>
+              </a:ln>
+            </p:spPr>
+            <p:style>
+              <a:lnRef idx="2">
+                <a:schemeClr val="accent1">
+                  <a:shade val="15000"/>
+                </a:schemeClr>
+              </a:lnRef>
+              <a:fillRef idx="1">
+                <a:schemeClr val="accent1"/>
+              </a:fillRef>
+              <a:effectRef idx="0">
+                <a:schemeClr val="accent1"/>
+              </a:effectRef>
+              <a:fontRef idx="minor">
+                <a:schemeClr val="lt1"/>
+              </a:fontRef>
+            </p:style>
+            <p:txBody>
+              <a:bodyPr rtlCol="0" anchor="ctr"/>
+              <a:lstStyle/>
+              <a:p>
+                <a:pPr algn="ctr"/>
+                <a:endParaRPr lang="en-US"/>
+              </a:p>
+            </p:txBody>
+          </p:sp>
+          <p:cxnSp>
+            <p:nvCxnSpPr>
+              <p:cNvPr id="95" name="Straight Connector 94">
+                <a:extLst>
+                  <a:ext uri="{FF2B5EF4-FFF2-40B4-BE49-F238E27FC236}">
+                    <a16:creationId xmlns:a16="http://schemas.microsoft.com/office/drawing/2014/main" id="{A469FEB4-C9AB-F6BD-43F6-45D4265D5D6B}"/>
+                  </a:ext>
+                </a:extLst>
+              </p:cNvPr>
+              <p:cNvCxnSpPr>
+                <a:stCxn id="85" idx="7"/>
+                <a:endCxn id="76" idx="3"/>
+              </p:cNvCxnSpPr>
+              <p:nvPr/>
+            </p:nvCxnSpPr>
+            <p:spPr>
+              <a:xfrm flipV="1">
+                <a:off x="8820070" y="3696593"/>
+                <a:ext cx="520432" cy="330222"/>
+              </a:xfrm>
+              <a:prstGeom prst="line">
+                <a:avLst/>
+              </a:prstGeom>
+              <a:ln>
+                <a:solidFill>
+                  <a:schemeClr val="tx1"/>
+                </a:solidFill>
+              </a:ln>
+            </p:spPr>
+            <p:style>
+              <a:lnRef idx="2">
+                <a:schemeClr val="accent1"/>
+              </a:lnRef>
+              <a:fillRef idx="0">
+                <a:schemeClr val="accent1"/>
+              </a:fillRef>
+              <a:effectRef idx="1">
+                <a:schemeClr val="accent1"/>
+              </a:effectRef>
+              <a:fontRef idx="minor">
+                <a:schemeClr val="tx1"/>
+              </a:fontRef>
+            </p:style>
+          </p:cxnSp>
+          <p:cxnSp>
+            <p:nvCxnSpPr>
+              <p:cNvPr id="96" name="Straight Connector 95">
+                <a:extLst>
+                  <a:ext uri="{FF2B5EF4-FFF2-40B4-BE49-F238E27FC236}">
+                    <a16:creationId xmlns:a16="http://schemas.microsoft.com/office/drawing/2014/main" id="{B31740FF-436B-28E8-A690-433997DBD8E6}"/>
+                  </a:ext>
+                </a:extLst>
+              </p:cNvPr>
+              <p:cNvCxnSpPr>
+                <a:cxnSpLocks/>
+                <a:stCxn id="86" idx="7"/>
+                <a:endCxn id="75" idx="3"/>
+              </p:cNvCxnSpPr>
+              <p:nvPr/>
+            </p:nvCxnSpPr>
+            <p:spPr>
+              <a:xfrm flipV="1">
+                <a:off x="8812031" y="3281115"/>
+                <a:ext cx="126655" cy="202440"/>
+              </a:xfrm>
+              <a:prstGeom prst="line">
+                <a:avLst/>
+              </a:prstGeom>
+              <a:ln>
+                <a:solidFill>
+                  <a:schemeClr val="tx1"/>
+                </a:solidFill>
+              </a:ln>
+            </p:spPr>
+            <p:style>
+              <a:lnRef idx="2">
+                <a:schemeClr val="accent1"/>
+              </a:lnRef>
+              <a:fillRef idx="0">
+                <a:schemeClr val="accent1"/>
+              </a:fillRef>
+              <a:effectRef idx="1">
+                <a:schemeClr val="accent1"/>
+              </a:effectRef>
+              <a:fontRef idx="minor">
+                <a:schemeClr val="tx1"/>
+              </a:fontRef>
+            </p:style>
+          </p:cxnSp>
+          <p:cxnSp>
+            <p:nvCxnSpPr>
+              <p:cNvPr id="99" name="Straight Connector 98">
+                <a:extLst>
+                  <a:ext uri="{FF2B5EF4-FFF2-40B4-BE49-F238E27FC236}">
+                    <a16:creationId xmlns:a16="http://schemas.microsoft.com/office/drawing/2014/main" id="{5B90D8C4-A0C4-4232-DE13-2378350B2897}"/>
+                  </a:ext>
+                </a:extLst>
+              </p:cNvPr>
+              <p:cNvCxnSpPr>
+                <a:cxnSpLocks/>
+                <a:stCxn id="87" idx="1"/>
+                <a:endCxn id="84" idx="5"/>
+              </p:cNvCxnSpPr>
+              <p:nvPr/>
+            </p:nvCxnSpPr>
+            <p:spPr>
+              <a:xfrm flipH="1" flipV="1">
+                <a:off x="8058417" y="3250649"/>
+                <a:ext cx="24408" cy="86781"/>
+              </a:xfrm>
+              <a:prstGeom prst="line">
+                <a:avLst/>
+              </a:prstGeom>
+              <a:ln>
+                <a:solidFill>
+                  <a:schemeClr val="tx1"/>
+                </a:solidFill>
+              </a:ln>
+            </p:spPr>
+            <p:style>
+              <a:lnRef idx="2">
+                <a:schemeClr val="accent1"/>
+              </a:lnRef>
+              <a:fillRef idx="0">
+                <a:schemeClr val="accent1"/>
+              </a:fillRef>
+              <a:effectRef idx="1">
+                <a:schemeClr val="accent1"/>
+              </a:effectRef>
+              <a:fontRef idx="minor">
+                <a:schemeClr val="tx1"/>
+              </a:fontRef>
+            </p:style>
+          </p:cxnSp>
+          <p:cxnSp>
+            <p:nvCxnSpPr>
+              <p:cNvPr id="104" name="Straight Connector 103">
+                <a:extLst>
+                  <a:ext uri="{FF2B5EF4-FFF2-40B4-BE49-F238E27FC236}">
+                    <a16:creationId xmlns:a16="http://schemas.microsoft.com/office/drawing/2014/main" id="{1227ABE4-38E0-8A7B-083D-C6591480CD40}"/>
+                  </a:ext>
+                </a:extLst>
+              </p:cNvPr>
+              <p:cNvCxnSpPr>
+                <a:cxnSpLocks/>
+                <a:stCxn id="83" idx="6"/>
+                <a:endCxn id="88" idx="2"/>
+              </p:cNvCxnSpPr>
+              <p:nvPr/>
+            </p:nvCxnSpPr>
+            <p:spPr>
+              <a:xfrm>
+                <a:off x="7613501" y="3685559"/>
+                <a:ext cx="282205" cy="69692"/>
+              </a:xfrm>
+              <a:prstGeom prst="line">
+                <a:avLst/>
+              </a:prstGeom>
+              <a:ln>
+                <a:solidFill>
+                  <a:schemeClr val="tx1"/>
+                </a:solidFill>
+              </a:ln>
+            </p:spPr>
+            <p:style>
+              <a:lnRef idx="2">
+                <a:schemeClr val="accent1"/>
+              </a:lnRef>
+              <a:fillRef idx="0">
+                <a:schemeClr val="accent1"/>
+              </a:fillRef>
+              <a:effectRef idx="1">
+                <a:schemeClr val="accent1"/>
+              </a:effectRef>
+              <a:fontRef idx="minor">
+                <a:schemeClr val="tx1"/>
+              </a:fontRef>
+            </p:style>
+          </p:cxnSp>
+          <p:cxnSp>
+            <p:nvCxnSpPr>
+              <p:cNvPr id="108" name="Straight Connector 107">
+                <a:extLst>
+                  <a:ext uri="{FF2B5EF4-FFF2-40B4-BE49-F238E27FC236}">
+                    <a16:creationId xmlns:a16="http://schemas.microsoft.com/office/drawing/2014/main" id="{1FB0D3CA-8E7D-3BB0-EB13-5A9AAFD5A8CC}"/>
+                  </a:ext>
+                </a:extLst>
+              </p:cNvPr>
+              <p:cNvCxnSpPr>
+                <a:cxnSpLocks/>
+                <a:stCxn id="82" idx="6"/>
+                <a:endCxn id="89" idx="2"/>
+              </p:cNvCxnSpPr>
+              <p:nvPr/>
+            </p:nvCxnSpPr>
+            <p:spPr>
+              <a:xfrm flipV="1">
+                <a:off x="7511612" y="4362819"/>
+                <a:ext cx="257814" cy="100888"/>
+              </a:xfrm>
+              <a:prstGeom prst="line">
+                <a:avLst/>
+              </a:prstGeom>
+              <a:ln>
+                <a:solidFill>
+                  <a:schemeClr val="tx1"/>
+                </a:solidFill>
+              </a:ln>
+            </p:spPr>
+            <p:style>
+              <a:lnRef idx="2">
+                <a:schemeClr val="accent1"/>
+              </a:lnRef>
+              <a:fillRef idx="0">
+                <a:schemeClr val="accent1"/>
+              </a:fillRef>
+              <a:effectRef idx="1">
+                <a:schemeClr val="accent1"/>
+              </a:effectRef>
+              <a:fontRef idx="minor">
+                <a:schemeClr val="tx1"/>
+              </a:fontRef>
+            </p:style>
+          </p:cxnSp>
+          <p:cxnSp>
+            <p:nvCxnSpPr>
+              <p:cNvPr id="111" name="Straight Connector 110">
+                <a:extLst>
+                  <a:ext uri="{FF2B5EF4-FFF2-40B4-BE49-F238E27FC236}">
+                    <a16:creationId xmlns:a16="http://schemas.microsoft.com/office/drawing/2014/main" id="{4ECB30C4-730B-1E9A-135E-59F30F0FCCF1}"/>
+                  </a:ext>
+                </a:extLst>
+              </p:cNvPr>
+              <p:cNvCxnSpPr>
+                <a:cxnSpLocks/>
+                <a:stCxn id="81" idx="7"/>
+                <a:endCxn id="90" idx="3"/>
+              </p:cNvCxnSpPr>
+              <p:nvPr/>
+            </p:nvCxnSpPr>
+            <p:spPr>
+              <a:xfrm flipV="1">
+                <a:off x="7744633" y="4944021"/>
+                <a:ext cx="191706" cy="218214"/>
+              </a:xfrm>
+              <a:prstGeom prst="line">
+                <a:avLst/>
+              </a:prstGeom>
+              <a:ln>
+                <a:solidFill>
+                  <a:schemeClr val="tx1"/>
+                </a:solidFill>
+              </a:ln>
+            </p:spPr>
+            <p:style>
+              <a:lnRef idx="2">
+                <a:schemeClr val="accent1"/>
+              </a:lnRef>
+              <a:fillRef idx="0">
+                <a:schemeClr val="accent1"/>
+              </a:fillRef>
+              <a:effectRef idx="1">
+                <a:schemeClr val="accent1"/>
+              </a:effectRef>
+              <a:fontRef idx="minor">
+                <a:schemeClr val="tx1"/>
+              </a:fontRef>
+            </p:style>
+          </p:cxnSp>
+          <p:cxnSp>
+            <p:nvCxnSpPr>
+              <p:cNvPr id="114" name="Straight Connector 113">
+                <a:extLst>
+                  <a:ext uri="{FF2B5EF4-FFF2-40B4-BE49-F238E27FC236}">
+                    <a16:creationId xmlns:a16="http://schemas.microsoft.com/office/drawing/2014/main" id="{9EADF112-246B-784A-3E01-FD05AC3B6A5B}"/>
+                  </a:ext>
+                </a:extLst>
+              </p:cNvPr>
+              <p:cNvCxnSpPr>
+                <a:cxnSpLocks/>
+                <a:stCxn id="80" idx="0"/>
+                <a:endCxn id="91" idx="4"/>
+              </p:cNvCxnSpPr>
+              <p:nvPr/>
+            </p:nvCxnSpPr>
+            <p:spPr>
+              <a:xfrm flipV="1">
+                <a:off x="8295355" y="5306738"/>
+                <a:ext cx="51290" cy="126396"/>
+              </a:xfrm>
+              <a:prstGeom prst="line">
+                <a:avLst/>
+              </a:prstGeom>
+              <a:ln>
+                <a:solidFill>
+                  <a:schemeClr val="tx1"/>
+                </a:solidFill>
+              </a:ln>
+            </p:spPr>
+            <p:style>
+              <a:lnRef idx="2">
+                <a:schemeClr val="accent1"/>
+              </a:lnRef>
+              <a:fillRef idx="0">
+                <a:schemeClr val="accent1"/>
+              </a:fillRef>
+              <a:effectRef idx="1">
+                <a:schemeClr val="accent1"/>
+              </a:effectRef>
+              <a:fontRef idx="minor">
+                <a:schemeClr val="tx1"/>
+              </a:fontRef>
+            </p:style>
+          </p:cxnSp>
+          <p:cxnSp>
+            <p:nvCxnSpPr>
+              <p:cNvPr id="117" name="Straight Connector 116">
+                <a:extLst>
+                  <a:ext uri="{FF2B5EF4-FFF2-40B4-BE49-F238E27FC236}">
+                    <a16:creationId xmlns:a16="http://schemas.microsoft.com/office/drawing/2014/main" id="{F2DB376A-3250-28DE-D862-017E7FE0725D}"/>
+                  </a:ext>
+                </a:extLst>
+              </p:cNvPr>
+              <p:cNvCxnSpPr>
+                <a:cxnSpLocks/>
+                <a:stCxn id="79" idx="1"/>
+                <a:endCxn id="92" idx="5"/>
+              </p:cNvCxnSpPr>
+              <p:nvPr/>
+            </p:nvCxnSpPr>
+            <p:spPr>
+              <a:xfrm flipH="1" flipV="1">
+                <a:off x="8935291" y="5152118"/>
+                <a:ext cx="3394" cy="101297"/>
+              </a:xfrm>
+              <a:prstGeom prst="line">
+                <a:avLst/>
+              </a:prstGeom>
+              <a:ln>
+                <a:solidFill>
+                  <a:schemeClr val="tx1"/>
+                </a:solidFill>
+              </a:ln>
+            </p:spPr>
+            <p:style>
+              <a:lnRef idx="2">
+                <a:schemeClr val="accent1"/>
+              </a:lnRef>
+              <a:fillRef idx="0">
+                <a:schemeClr val="accent1"/>
+              </a:fillRef>
+              <a:effectRef idx="1">
+                <a:schemeClr val="accent1"/>
+              </a:effectRef>
+              <a:fontRef idx="minor">
+                <a:schemeClr val="tx1"/>
+              </a:fontRef>
+            </p:style>
+          </p:cxnSp>
+          <p:cxnSp>
+            <p:nvCxnSpPr>
+              <p:cNvPr id="120" name="Straight Connector 119">
+                <a:extLst>
+                  <a:ext uri="{FF2B5EF4-FFF2-40B4-BE49-F238E27FC236}">
+                    <a16:creationId xmlns:a16="http://schemas.microsoft.com/office/drawing/2014/main" id="{4286FF20-BAAC-707C-DFC0-BE64E1FCDF56}"/>
+                  </a:ext>
+                </a:extLst>
+              </p:cNvPr>
+              <p:cNvCxnSpPr>
+                <a:cxnSpLocks/>
+                <a:stCxn id="78" idx="2"/>
+                <a:endCxn id="93" idx="6"/>
+              </p:cNvCxnSpPr>
+              <p:nvPr/>
+            </p:nvCxnSpPr>
+            <p:spPr>
+              <a:xfrm flipH="1" flipV="1">
+                <a:off x="9378229" y="4791710"/>
+                <a:ext cx="58652" cy="50787"/>
+              </a:xfrm>
+              <a:prstGeom prst="line">
+                <a:avLst/>
+              </a:prstGeom>
+              <a:ln>
+                <a:solidFill>
+                  <a:schemeClr val="tx1"/>
+                </a:solidFill>
+              </a:ln>
+            </p:spPr>
+            <p:style>
+              <a:lnRef idx="2">
+                <a:schemeClr val="accent1"/>
+              </a:lnRef>
+              <a:fillRef idx="0">
+                <a:schemeClr val="accent1"/>
+              </a:fillRef>
+              <a:effectRef idx="1">
+                <a:schemeClr val="accent1"/>
+              </a:effectRef>
+              <a:fontRef idx="minor">
+                <a:schemeClr val="tx1"/>
+              </a:fontRef>
+            </p:style>
+          </p:cxnSp>
+          <p:sp>
+            <p:nvSpPr>
+              <p:cNvPr id="123" name="Oval 122">
+                <a:extLst>
+                  <a:ext uri="{FF2B5EF4-FFF2-40B4-BE49-F238E27FC236}">
+                    <a16:creationId xmlns:a16="http://schemas.microsoft.com/office/drawing/2014/main" id="{30101227-E191-7B14-B5B7-4C6C1426BC3F}"/>
+                  </a:ext>
+                </a:extLst>
+              </p:cNvPr>
+              <p:cNvSpPr/>
+              <p:nvPr/>
+            </p:nvSpPr>
+            <p:spPr>
+              <a:xfrm>
+                <a:off x="9001489" y="4338418"/>
+                <a:ext cx="169297" cy="169297"/>
+              </a:xfrm>
+              <a:prstGeom prst="ellipse">
+                <a:avLst/>
+              </a:prstGeom>
+              <a:solidFill>
+                <a:srgbClr val="92D050"/>
+              </a:solidFill>
+              <a:ln>
+                <a:solidFill>
+                  <a:schemeClr val="tx1"/>
+                </a:solidFill>
+              </a:ln>
+            </p:spPr>
+            <p:style>
+              <a:lnRef idx="2">
+                <a:schemeClr val="accent1">
+                  <a:shade val="15000"/>
+                </a:schemeClr>
+              </a:lnRef>
+              <a:fillRef idx="1">
+                <a:schemeClr val="accent1"/>
+              </a:fillRef>
+              <a:effectRef idx="0">
+                <a:schemeClr val="accent1"/>
+              </a:effectRef>
+              <a:fontRef idx="minor">
+                <a:schemeClr val="lt1"/>
+              </a:fontRef>
+            </p:style>
+            <p:txBody>
+              <a:bodyPr rtlCol="0" anchor="ctr"/>
+              <a:lstStyle/>
+              <a:p>
+                <a:pPr algn="ctr"/>
+                <a:endParaRPr lang="en-US"/>
+              </a:p>
+            </p:txBody>
+          </p:sp>
+          <p:cxnSp>
+            <p:nvCxnSpPr>
+              <p:cNvPr id="124" name="Straight Connector 123">
+                <a:extLst>
+                  <a:ext uri="{FF2B5EF4-FFF2-40B4-BE49-F238E27FC236}">
+                    <a16:creationId xmlns:a16="http://schemas.microsoft.com/office/drawing/2014/main" id="{0B68EA95-C10D-B0DD-F306-8658120D63FD}"/>
+                  </a:ext>
+                </a:extLst>
+              </p:cNvPr>
+              <p:cNvCxnSpPr>
+                <a:cxnSpLocks/>
+                <a:stCxn id="123" idx="7"/>
+                <a:endCxn id="77" idx="2"/>
+              </p:cNvCxnSpPr>
+              <p:nvPr/>
+            </p:nvCxnSpPr>
+            <p:spPr>
+              <a:xfrm flipV="1">
+                <a:off x="9145993" y="4233646"/>
+                <a:ext cx="415926" cy="129565"/>
+              </a:xfrm>
+              <a:prstGeom prst="line">
+                <a:avLst/>
+              </a:prstGeom>
+              <a:ln>
+                <a:solidFill>
+                  <a:schemeClr val="tx1"/>
+                </a:solidFill>
+              </a:ln>
+            </p:spPr>
+            <p:style>
+              <a:lnRef idx="2">
+                <a:schemeClr val="accent1"/>
+              </a:lnRef>
+              <a:fillRef idx="0">
+                <a:schemeClr val="accent1"/>
+              </a:fillRef>
+              <a:effectRef idx="1">
+                <a:schemeClr val="accent1"/>
+              </a:effectRef>
+              <a:fontRef idx="minor">
+                <a:schemeClr val="tx1"/>
+              </a:fontRef>
+            </p:style>
+          </p:cxnSp>
+          <p:sp>
+            <p:nvSpPr>
+              <p:cNvPr id="128" name="TextBox 127">
+                <a:extLst>
+                  <a:ext uri="{FF2B5EF4-FFF2-40B4-BE49-F238E27FC236}">
+                    <a16:creationId xmlns:a16="http://schemas.microsoft.com/office/drawing/2014/main" id="{80A95484-B0DA-0567-D3D0-A7771D67D0B4}"/>
+                  </a:ext>
+                </a:extLst>
+              </p:cNvPr>
+              <p:cNvSpPr txBox="1"/>
+              <p:nvPr/>
+            </p:nvSpPr>
+            <p:spPr>
+              <a:xfrm>
+                <a:off x="8968560" y="3772007"/>
+                <a:ext cx="357790" cy="461665"/>
+              </a:xfrm>
+              <a:prstGeom prst="rect">
+                <a:avLst/>
+              </a:prstGeom>
+              <a:noFill/>
+            </p:spPr>
+            <p:txBody>
+              <a:bodyPr wrap="none" rtlCol="0">
+                <a:spAutoFit/>
+              </a:bodyPr>
+              <a:lstStyle/>
+              <a:p>
+                <a:r>
+                  <a:rPr lang="en-US" sz="2400" i="1" dirty="0"/>
+                  <a:t>d</a:t>
+                </a:r>
+                <a:endParaRPr lang="en-US" i="1" dirty="0"/>
+              </a:p>
+            </p:txBody>
+          </p:sp>
+        </p:grpSp>
+      </p:grpSp>
+    </p:spTree>
+    <p:extLst>
+      <p:ext uri="{BB962C8B-B14F-4D97-AF65-F5344CB8AC3E}">
+        <p14:creationId xmlns:p14="http://schemas.microsoft.com/office/powerpoint/2010/main" val="1137531425"/>
+      </p:ext>
+    </p:extLst>
+  </p:cSld>
+  <p:clrMapOvr>
+    <a:masterClrMapping/>
+  </p:clrMapOvr>
+</p:sld>
+</file>
+
 <file path=ppt/theme/theme1.xml><?xml version="1.0" encoding="utf-8"?>
 <a:theme xmlns:a="http://schemas.openxmlformats.org/drawingml/2006/main" name="Office Theme">
   <a:themeElements>
